--- a/output_pptx/Christ_Is_Enough.pptx
+++ b/output_pptx/Christ_Is_Enough.pptx
@@ -3131,23 +3131,23 @@
         </p:nvSpPr>
         <p:spPr>
           <a:xfrm>
-            <a:off x="594360" y="2258568"/>
-            <a:ext cx="11002975" cy="685800"/>
-          </a:xfrm>
-          <a:prstGeom prst="rect">
-            <a:avLst/>
-          </a:prstGeom>
-          <a:noFill/>
-        </p:spPr>
-        <p:txBody>
-          <a:bodyPr wrap="square">
-            <a:spAutoFit/>
-          </a:bodyPr>
-          <a:lstStyle/>
-          <a:p>
-            <a:pPr algn="ctr"/>
-            <a:r>
-              <a:rPr sz="4400" b="1" i="0">
+            <a:off x="640080" y="2052828"/>
+            <a:ext cx="10911535" cy="731520"/>
+          </a:xfrm>
+          <a:prstGeom prst="rect">
+            <a:avLst/>
+          </a:prstGeom>
+          <a:noFill/>
+        </p:spPr>
+        <p:txBody>
+          <a:bodyPr wrap="square">
+            <a:spAutoFit/>
+          </a:bodyPr>
+          <a:lstStyle/>
+          <a:p>
+            <a:pPr algn="ctr"/>
+            <a:r>
+              <a:rPr sz="4800" b="1" i="0">
                 <a:solidFill>
                   <a:srgbClr val="FFFFFF"/>
                 </a:solidFill>
@@ -3166,99 +3166,29 @@
         </p:nvSpPr>
         <p:spPr>
           <a:xfrm>
-            <a:off x="594360" y="2980944"/>
-            <a:ext cx="11002975" cy="347472"/>
-          </a:xfrm>
-          <a:prstGeom prst="rect">
-            <a:avLst/>
-          </a:prstGeom>
-          <a:noFill/>
-        </p:spPr>
-        <p:txBody>
-          <a:bodyPr wrap="square">
-            <a:spAutoFit/>
-          </a:bodyPr>
-          <a:lstStyle/>
-          <a:p>
-            <a:pPr algn="ctr"/>
-            <a:r>
-              <a:rPr sz="2200" b="0" i="1">
-                <a:solidFill>
-                  <a:srgbClr val="8C8C8C"/>
-                </a:solidFill>
-                <a:latin typeface="Arial"/>
-              </a:rPr>
-              <a:t/>
-            </a:r>
-          </a:p>
-        </p:txBody>
-      </p:sp>
-      <p:sp>
-        <p:nvSpPr>
-          <p:cNvPr id="4" name="TextBox 3"/>
-          <p:cNvSpPr txBox="1"/>
-          <p:nvPr/>
-        </p:nvSpPr>
-        <p:spPr>
-          <a:xfrm>
-            <a:off x="594360" y="3529584"/>
-            <a:ext cx="11002975" cy="685800"/>
-          </a:xfrm>
-          <a:prstGeom prst="rect">
-            <a:avLst/>
-          </a:prstGeom>
-          <a:noFill/>
-        </p:spPr>
-        <p:txBody>
-          <a:bodyPr wrap="square">
-            <a:spAutoFit/>
-          </a:bodyPr>
-          <a:lstStyle/>
-          <a:p>
-            <a:pPr algn="ctr"/>
-            <a:r>
-              <a:rPr sz="4400" b="1" i="0">
+            <a:off x="640080" y="2985516"/>
+            <a:ext cx="10911535" cy="731520"/>
+          </a:xfrm>
+          <a:prstGeom prst="rect">
+            <a:avLst/>
+          </a:prstGeom>
+          <a:noFill/>
+        </p:spPr>
+        <p:txBody>
+          <a:bodyPr wrap="square">
+            <a:spAutoFit/>
+          </a:bodyPr>
+          <a:lstStyle/>
+          <a:p>
+            <a:pPr algn="ctr"/>
+            <a:r>
+              <a:rPr sz="4800" b="1" i="0">
                 <a:solidFill>
                   <a:srgbClr val="FFFFFF"/>
                 </a:solidFill>
                 <a:latin typeface="Arial"/>
               </a:rPr>
               <a:t>Cristo é a minha recompensa</a:t>
-            </a:r>
-          </a:p>
-        </p:txBody>
-      </p:sp>
-      <p:sp>
-        <p:nvSpPr>
-          <p:cNvPr id="5" name="TextBox 4"/>
-          <p:cNvSpPr txBox="1"/>
-          <p:nvPr/>
-        </p:nvSpPr>
-        <p:spPr>
-          <a:xfrm>
-            <a:off x="594360" y="4251960"/>
-            <a:ext cx="11002975" cy="347472"/>
-          </a:xfrm>
-          <a:prstGeom prst="rect">
-            <a:avLst/>
-          </a:prstGeom>
-          <a:noFill/>
-        </p:spPr>
-        <p:txBody>
-          <a:bodyPr wrap="square">
-            <a:spAutoFit/>
-          </a:bodyPr>
-          <a:lstStyle/>
-          <a:p>
-            <a:pPr algn="ctr"/>
-            <a:r>
-              <a:rPr sz="2200" b="0" i="1">
-                <a:solidFill>
-                  <a:srgbClr val="8C8C8C"/>
-                </a:solidFill>
-                <a:latin typeface="Arial"/>
-              </a:rPr>
-              <a:t/>
             </a:r>
           </a:p>
         </p:txBody>
@@ -3297,23 +3227,23 @@
         </p:nvSpPr>
         <p:spPr>
           <a:xfrm>
-            <a:off x="594360" y="1837944"/>
-            <a:ext cx="11002975" cy="685800"/>
-          </a:xfrm>
-          <a:prstGeom prst="rect">
-            <a:avLst/>
-          </a:prstGeom>
-          <a:noFill/>
-        </p:spPr>
-        <p:txBody>
-          <a:bodyPr wrap="square">
-            <a:spAutoFit/>
-          </a:bodyPr>
-          <a:lstStyle/>
-          <a:p>
-            <a:pPr algn="ctr"/>
-            <a:r>
-              <a:rPr sz="4400" b="1" i="0">
+            <a:off x="640080" y="1650492"/>
+            <a:ext cx="10911535" cy="731520"/>
+          </a:xfrm>
+          <a:prstGeom prst="rect">
+            <a:avLst/>
+          </a:prstGeom>
+          <a:noFill/>
+        </p:spPr>
+        <p:txBody>
+          <a:bodyPr wrap="square">
+            <a:spAutoFit/>
+          </a:bodyPr>
+          <a:lstStyle/>
+          <a:p>
+            <a:pPr algn="ctr"/>
+            <a:r>
+              <a:rPr sz="4800" b="1" i="0">
                 <a:solidFill>
                   <a:srgbClr val="FFFFFF"/>
                 </a:solidFill>
@@ -3332,8 +3262,8 @@
         </p:nvSpPr>
         <p:spPr>
           <a:xfrm>
-            <a:off x="594360" y="2560320"/>
-            <a:ext cx="11002975" cy="384048"/>
+            <a:off x="640080" y="2418588"/>
+            <a:ext cx="10911535" cy="365760"/>
           </a:xfrm>
           <a:prstGeom prst="rect">
             <a:avLst/>
@@ -3350,7 +3280,7 @@
             <a:r>
               <a:rPr sz="2400" b="0" i="1">
                 <a:solidFill>
-                  <a:srgbClr val="B4B4B4"/>
+                  <a:srgbClr val="AAAAAA"/>
                 </a:solidFill>
                 <a:latin typeface="Arial"/>
               </a:rPr>
@@ -3367,8 +3297,78 @@
         </p:nvSpPr>
         <p:spPr>
           <a:xfrm>
-            <a:off x="594360" y="2980944"/>
-            <a:ext cx="11002975" cy="347472"/>
+            <a:off x="640080" y="2985516"/>
+            <a:ext cx="10911535" cy="731520"/>
+          </a:xfrm>
+          <a:prstGeom prst="rect">
+            <a:avLst/>
+          </a:prstGeom>
+          <a:noFill/>
+        </p:spPr>
+        <p:txBody>
+          <a:bodyPr wrap="square">
+            <a:spAutoFit/>
+          </a:bodyPr>
+          <a:lstStyle/>
+          <a:p>
+            <a:pPr algn="ctr"/>
+            <a:r>
+              <a:rPr sz="4800" b="1" i="0">
+                <a:solidFill>
+                  <a:srgbClr val="FFFFFF"/>
+                </a:solidFill>
+                <a:latin typeface="Arial"/>
+              </a:rPr>
+              <a:t>すべてある 十分に 　すべてある</a:t>
+            </a:r>
+          </a:p>
+        </p:txBody>
+      </p:sp>
+      <p:sp>
+        <p:nvSpPr>
+          <p:cNvPr id="5" name="TextBox 4"/>
+          <p:cNvSpPr txBox="1"/>
+          <p:nvPr/>
+        </p:nvSpPr>
+        <p:spPr>
+          <a:xfrm>
+            <a:off x="640080" y="3753612"/>
+            <a:ext cx="10911535" cy="365760"/>
+          </a:xfrm>
+          <a:prstGeom prst="rect">
+            <a:avLst/>
+          </a:prstGeom>
+          <a:noFill/>
+        </p:spPr>
+        <p:txBody>
+          <a:bodyPr wrap="square">
+            <a:spAutoFit/>
+          </a:bodyPr>
+          <a:lstStyle/>
+          <a:p>
+            <a:pPr algn="ctr"/>
+            <a:r>
+              <a:rPr sz="2400" b="0" i="1">
+                <a:solidFill>
+                  <a:srgbClr val="AAAAAA"/>
+                </a:solidFill>
+                <a:latin typeface="Arial"/>
+              </a:rPr>
+              <a:t>subetearu juubun ni subetearu</a:t>
+            </a:r>
+          </a:p>
+        </p:txBody>
+      </p:sp>
+      <p:sp>
+        <p:nvSpPr>
+          <p:cNvPr id="6" name="TextBox 5"/>
+          <p:cNvSpPr txBox="1"/>
+          <p:nvPr/>
+        </p:nvSpPr>
+        <p:spPr>
+          <a:xfrm>
+            <a:off x="640080" y="4530852"/>
+            <a:ext cx="10911535" cy="310896"/>
           </a:xfrm>
           <a:prstGeom prst="rect">
             <a:avLst/>
@@ -3385,81 +3385,11 @@
             <a:r>
               <a:rPr sz="2000" b="0" i="1">
                 <a:solidFill>
-                  <a:srgbClr val="8C8C8C"/>
-                </a:solidFill>
-                <a:latin typeface="Arial"/>
-              </a:rPr>
-              <a:t/>
-            </a:r>
-          </a:p>
-        </p:txBody>
-      </p:sp>
-      <p:sp>
-        <p:nvSpPr>
-          <p:cNvPr id="5" name="TextBox 4"/>
-          <p:cNvSpPr txBox="1"/>
-          <p:nvPr/>
-        </p:nvSpPr>
-        <p:spPr>
-          <a:xfrm>
-            <a:off x="594360" y="3529584"/>
-            <a:ext cx="11002975" cy="685800"/>
-          </a:xfrm>
-          <a:prstGeom prst="rect">
-            <a:avLst/>
-          </a:prstGeom>
-          <a:noFill/>
-        </p:spPr>
-        <p:txBody>
-          <a:bodyPr wrap="square">
-            <a:spAutoFit/>
-          </a:bodyPr>
-          <a:lstStyle/>
-          <a:p>
-            <a:pPr algn="ctr"/>
-            <a:r>
-              <a:rPr sz="4400" b="1" i="0">
-                <a:solidFill>
-                  <a:srgbClr val="FFFFFF"/>
-                </a:solidFill>
-                <a:latin typeface="Arial"/>
-              </a:rPr>
-              <a:t>すべてある 十分に 　すべてある</a:t>
-            </a:r>
-          </a:p>
-        </p:txBody>
-      </p:sp>
-      <p:sp>
-        <p:nvSpPr>
-          <p:cNvPr id="6" name="TextBox 5"/>
-          <p:cNvSpPr txBox="1"/>
-          <p:nvPr/>
-        </p:nvSpPr>
-        <p:spPr>
-          <a:xfrm>
-            <a:off x="594360" y="4251960"/>
-            <a:ext cx="11002975" cy="384048"/>
-          </a:xfrm>
-          <a:prstGeom prst="rect">
-            <a:avLst/>
-          </a:prstGeom>
-          <a:noFill/>
-        </p:spPr>
-        <p:txBody>
-          <a:bodyPr wrap="square">
-            <a:spAutoFit/>
-          </a:bodyPr>
-          <a:lstStyle/>
-          <a:p>
-            <a:pPr algn="ctr"/>
-            <a:r>
-              <a:rPr sz="2400" b="0" i="1">
-                <a:solidFill>
-                  <a:srgbClr val="B4B4B4"/>
-                </a:solidFill>
-                <a:latin typeface="Arial"/>
-              </a:rPr>
-              <a:t>subetearu juubun ni subetearu</a:t>
+                  <a:srgbClr val="828282"/>
+                </a:solidFill>
+                <a:latin typeface="Arial"/>
+              </a:rPr>
+              <a:t>A minha alma vai cantar</a:t>
             </a:r>
           </a:p>
         </p:txBody>
@@ -3472,8 +3402,8 @@
         </p:nvSpPr>
         <p:spPr>
           <a:xfrm>
-            <a:off x="594360" y="4672584"/>
-            <a:ext cx="11002975" cy="347472"/>
+            <a:off x="640080" y="4896612"/>
+            <a:ext cx="10911535" cy="310896"/>
           </a:xfrm>
           <a:prstGeom prst="rect">
             <a:avLst/>
@@ -3490,11 +3420,11 @@
             <a:r>
               <a:rPr sz="2000" b="0" i="1">
                 <a:solidFill>
-                  <a:srgbClr val="8C8C8C"/>
-                </a:solidFill>
-                <a:latin typeface="Arial"/>
-              </a:rPr>
-              <a:t/>
+                  <a:srgbClr val="828282"/>
+                </a:solidFill>
+                <a:latin typeface="Arial"/>
+              </a:rPr>
+              <a:t>Não tem volta, eu fui posto em liberdade</a:t>
             </a:r>
           </a:p>
         </p:txBody>
@@ -3533,23 +3463,23 @@
         </p:nvSpPr>
         <p:spPr>
           <a:xfrm>
-            <a:off x="594360" y="2258568"/>
-            <a:ext cx="11002975" cy="685800"/>
-          </a:xfrm>
-          <a:prstGeom prst="rect">
-            <a:avLst/>
-          </a:prstGeom>
-          <a:noFill/>
-        </p:spPr>
-        <p:txBody>
-          <a:bodyPr wrap="square">
-            <a:spAutoFit/>
-          </a:bodyPr>
-          <a:lstStyle/>
-          <a:p>
-            <a:pPr algn="ctr"/>
-            <a:r>
-              <a:rPr sz="4400" b="1" i="0">
+            <a:off x="640080" y="2052828"/>
+            <a:ext cx="10911535" cy="731520"/>
+          </a:xfrm>
+          <a:prstGeom prst="rect">
+            <a:avLst/>
+          </a:prstGeom>
+          <a:noFill/>
+        </p:spPr>
+        <p:txBody>
+          <a:bodyPr wrap="square">
+            <a:spAutoFit/>
+          </a:bodyPr>
+          <a:lstStyle/>
+          <a:p>
+            <a:pPr algn="ctr"/>
+            <a:r>
+              <a:rPr sz="4800" b="1" i="0">
                 <a:solidFill>
                   <a:srgbClr val="FFFFFF"/>
                 </a:solidFill>
@@ -3568,29 +3498,29 @@
         </p:nvSpPr>
         <p:spPr>
           <a:xfrm>
-            <a:off x="594360" y="2980944"/>
-            <a:ext cx="11002975" cy="347472"/>
-          </a:xfrm>
-          <a:prstGeom prst="rect">
-            <a:avLst/>
-          </a:prstGeom>
-          <a:noFill/>
-        </p:spPr>
-        <p:txBody>
-          <a:bodyPr wrap="square">
-            <a:spAutoFit/>
-          </a:bodyPr>
-          <a:lstStyle/>
-          <a:p>
-            <a:pPr algn="ctr"/>
-            <a:r>
-              <a:rPr sz="2200" b="0" i="1">
-                <a:solidFill>
-                  <a:srgbClr val="8C8C8C"/>
-                </a:solidFill>
-                <a:latin typeface="Arial"/>
-              </a:rPr>
-              <a:t/>
+            <a:off x="640080" y="2985516"/>
+            <a:ext cx="10911535" cy="731520"/>
+          </a:xfrm>
+          <a:prstGeom prst="rect">
+            <a:avLst/>
+          </a:prstGeom>
+          <a:noFill/>
+        </p:spPr>
+        <p:txBody>
+          <a:bodyPr wrap="square">
+            <a:spAutoFit/>
+          </a:bodyPr>
+          <a:lstStyle/>
+          <a:p>
+            <a:pPr algn="ctr"/>
+            <a:r>
+              <a:rPr sz="4800" b="1" i="0">
+                <a:solidFill>
+                  <a:srgbClr val="FFFFFF"/>
+                </a:solidFill>
+                <a:latin typeface="Arial"/>
+              </a:rPr>
+              <a:t>Tudo o que eu preciso</a:t>
             </a:r>
           </a:p>
         </p:txBody>
@@ -3603,29 +3533,29 @@
         </p:nvSpPr>
         <p:spPr>
           <a:xfrm>
-            <a:off x="594360" y="3529584"/>
-            <a:ext cx="11002975" cy="685800"/>
-          </a:xfrm>
-          <a:prstGeom prst="rect">
-            <a:avLst/>
-          </a:prstGeom>
-          <a:noFill/>
-        </p:spPr>
-        <p:txBody>
-          <a:bodyPr wrap="square">
-            <a:spAutoFit/>
-          </a:bodyPr>
-          <a:lstStyle/>
-          <a:p>
-            <a:pPr algn="ctr"/>
-            <a:r>
-              <a:rPr sz="4400" b="1" i="0">
-                <a:solidFill>
-                  <a:srgbClr val="FFFFFF"/>
-                </a:solidFill>
-                <a:latin typeface="Arial"/>
-              </a:rPr>
-              <a:t>Tudo o que eu preciso</a:t>
+            <a:off x="640080" y="4128516"/>
+            <a:ext cx="10911535" cy="310896"/>
+          </a:xfrm>
+          <a:prstGeom prst="rect">
+            <a:avLst/>
+          </a:prstGeom>
+          <a:noFill/>
+        </p:spPr>
+        <p:txBody>
+          <a:bodyPr wrap="square">
+            <a:spAutoFit/>
+          </a:bodyPr>
+          <a:lstStyle/>
+          <a:p>
+            <a:pPr algn="ctr"/>
+            <a:r>
+              <a:rPr sz="2000" b="0" i="0">
+                <a:solidFill>
+                  <a:srgbClr val="828282"/>
+                </a:solidFill>
+                <a:latin typeface="Arial"/>
+              </a:rPr>
+              <a:t>ついてゆ - く     イエスだけに</a:t>
             </a:r>
           </a:p>
         </p:txBody>
@@ -3638,29 +3568,29 @@
         </p:nvSpPr>
         <p:spPr>
           <a:xfrm>
-            <a:off x="594360" y="4251960"/>
-            <a:ext cx="11002975" cy="347472"/>
-          </a:xfrm>
-          <a:prstGeom prst="rect">
-            <a:avLst/>
-          </a:prstGeom>
-          <a:noFill/>
-        </p:spPr>
-        <p:txBody>
-          <a:bodyPr wrap="square">
-            <a:spAutoFit/>
-          </a:bodyPr>
-          <a:lstStyle/>
-          <a:p>
-            <a:pPr algn="ctr"/>
-            <a:r>
-              <a:rPr sz="2200" b="0" i="1">
-                <a:solidFill>
-                  <a:srgbClr val="8C8C8C"/>
-                </a:solidFill>
-                <a:latin typeface="Arial"/>
-              </a:rPr>
-              <a:t/>
+            <a:off x="640080" y="4494276"/>
+            <a:ext cx="10911535" cy="310896"/>
+          </a:xfrm>
+          <a:prstGeom prst="rect">
+            <a:avLst/>
+          </a:prstGeom>
+          <a:noFill/>
+        </p:spPr>
+        <p:txBody>
+          <a:bodyPr wrap="square">
+            <a:spAutoFit/>
+          </a:bodyPr>
+          <a:lstStyle/>
+          <a:p>
+            <a:pPr algn="ctr"/>
+            <a:r>
+              <a:rPr sz="2000" b="0" i="0">
+                <a:solidFill>
+                  <a:srgbClr val="828282"/>
+                </a:solidFill>
+                <a:latin typeface="Arial"/>
+              </a:rPr>
+              <a:t>振り向かない         振り向かない</a:t>
             </a:r>
           </a:p>
         </p:txBody>
@@ -3699,23 +3629,23 @@
         </p:nvSpPr>
         <p:spPr>
           <a:xfrm>
-            <a:off x="594360" y="2258568"/>
-            <a:ext cx="11002975" cy="685800"/>
-          </a:xfrm>
-          <a:prstGeom prst="rect">
-            <a:avLst/>
-          </a:prstGeom>
-          <a:noFill/>
-        </p:spPr>
-        <p:txBody>
-          <a:bodyPr wrap="square">
-            <a:spAutoFit/>
-          </a:bodyPr>
-          <a:lstStyle/>
-          <a:p>
-            <a:pPr algn="ctr"/>
-            <a:r>
-              <a:rPr sz="4400" b="1" i="0">
+            <a:off x="640080" y="2052828"/>
+            <a:ext cx="10911535" cy="731520"/>
+          </a:xfrm>
+          <a:prstGeom prst="rect">
+            <a:avLst/>
+          </a:prstGeom>
+          <a:noFill/>
+        </p:spPr>
+        <p:txBody>
+          <a:bodyPr wrap="square">
+            <a:spAutoFit/>
+          </a:bodyPr>
+          <a:lstStyle/>
+          <a:p>
+            <a:pPr algn="ctr"/>
+            <a:r>
+              <a:rPr sz="4800" b="1" i="0">
                 <a:solidFill>
                   <a:srgbClr val="FFFFFF"/>
                 </a:solidFill>
@@ -3734,29 +3664,29 @@
         </p:nvSpPr>
         <p:spPr>
           <a:xfrm>
-            <a:off x="594360" y="2980944"/>
-            <a:ext cx="11002975" cy="347472"/>
-          </a:xfrm>
-          <a:prstGeom prst="rect">
-            <a:avLst/>
-          </a:prstGeom>
-          <a:noFill/>
-        </p:spPr>
-        <p:txBody>
-          <a:bodyPr wrap="square">
-            <a:spAutoFit/>
-          </a:bodyPr>
-          <a:lstStyle/>
-          <a:p>
-            <a:pPr algn="ctr"/>
-            <a:r>
-              <a:rPr sz="2200" b="0" i="1">
-                <a:solidFill>
-                  <a:srgbClr val="8C8C8C"/>
-                </a:solidFill>
-                <a:latin typeface="Arial"/>
-              </a:rPr>
-              <a:t/>
+            <a:off x="640080" y="2985516"/>
+            <a:ext cx="10911535" cy="731520"/>
+          </a:xfrm>
+          <a:prstGeom prst="rect">
+            <a:avLst/>
+          </a:prstGeom>
+          <a:noFill/>
+        </p:spPr>
+        <p:txBody>
+          <a:bodyPr wrap="square">
+            <a:spAutoFit/>
+          </a:bodyPr>
+          <a:lstStyle/>
+          <a:p>
+            <a:pPr algn="ctr"/>
+            <a:r>
+              <a:rPr sz="4800" b="1" i="0">
+                <a:solidFill>
+                  <a:srgbClr val="FFFFFF"/>
+                </a:solidFill>
+                <a:latin typeface="Arial"/>
+              </a:rPr>
+              <a:t>A alegria da minha salvação</a:t>
             </a:r>
           </a:p>
         </p:txBody>
@@ -3769,29 +3699,29 @@
         </p:nvSpPr>
         <p:spPr>
           <a:xfrm>
-            <a:off x="594360" y="3529584"/>
-            <a:ext cx="11002975" cy="685800"/>
-          </a:xfrm>
-          <a:prstGeom prst="rect">
-            <a:avLst/>
-          </a:prstGeom>
-          <a:noFill/>
-        </p:spPr>
-        <p:txBody>
-          <a:bodyPr wrap="square">
-            <a:spAutoFit/>
-          </a:bodyPr>
-          <a:lstStyle/>
-          <a:p>
-            <a:pPr algn="ctr"/>
-            <a:r>
-              <a:rPr sz="4400" b="1" i="0">
-                <a:solidFill>
-                  <a:srgbClr val="FFFFFF"/>
-                </a:solidFill>
-                <a:latin typeface="Arial"/>
-              </a:rPr>
-              <a:t>A alegria da minha salvação</a:t>
+            <a:off x="640080" y="4128516"/>
+            <a:ext cx="10911535" cy="310896"/>
+          </a:xfrm>
+          <a:prstGeom prst="rect">
+            <a:avLst/>
+          </a:prstGeom>
+          <a:noFill/>
+        </p:spPr>
+        <p:txBody>
+          <a:bodyPr wrap="square">
+            <a:spAutoFit/>
+          </a:bodyPr>
+          <a:lstStyle/>
+          <a:p>
+            <a:pPr algn="ctr"/>
+            <a:r>
+              <a:rPr sz="2000" b="0" i="0">
+                <a:solidFill>
+                  <a:srgbClr val="828282"/>
+                </a:solidFill>
+                <a:latin typeface="Arial"/>
+              </a:rPr>
+              <a:t>ついてゆ - く     イエスだけに</a:t>
             </a:r>
           </a:p>
         </p:txBody>
@@ -3804,29 +3734,29 @@
         </p:nvSpPr>
         <p:spPr>
           <a:xfrm>
-            <a:off x="594360" y="4251960"/>
-            <a:ext cx="11002975" cy="347472"/>
-          </a:xfrm>
-          <a:prstGeom prst="rect">
-            <a:avLst/>
-          </a:prstGeom>
-          <a:noFill/>
-        </p:spPr>
-        <p:txBody>
-          <a:bodyPr wrap="square">
-            <a:spAutoFit/>
-          </a:bodyPr>
-          <a:lstStyle/>
-          <a:p>
-            <a:pPr algn="ctr"/>
-            <a:r>
-              <a:rPr sz="2200" b="0" i="1">
-                <a:solidFill>
-                  <a:srgbClr val="8C8C8C"/>
-                </a:solidFill>
-                <a:latin typeface="Arial"/>
-              </a:rPr>
-              <a:t/>
+            <a:off x="640080" y="4494276"/>
+            <a:ext cx="10911535" cy="310896"/>
+          </a:xfrm>
+          <a:prstGeom prst="rect">
+            <a:avLst/>
+          </a:prstGeom>
+          <a:noFill/>
+        </p:spPr>
+        <p:txBody>
+          <a:bodyPr wrap="square">
+            <a:spAutoFit/>
+          </a:bodyPr>
+          <a:lstStyle/>
+          <a:p>
+            <a:pPr algn="ctr"/>
+            <a:r>
+              <a:rPr sz="2000" b="0" i="0">
+                <a:solidFill>
+                  <a:srgbClr val="828282"/>
+                </a:solidFill>
+                <a:latin typeface="Arial"/>
+              </a:rPr>
+              <a:t>振り向かない    振り向かない</a:t>
             </a:r>
           </a:p>
         </p:txBody>
@@ -3865,23 +3795,23 @@
         </p:nvSpPr>
         <p:spPr>
           <a:xfrm>
-            <a:off x="594360" y="2258568"/>
-            <a:ext cx="11002975" cy="685800"/>
-          </a:xfrm>
-          <a:prstGeom prst="rect">
-            <a:avLst/>
-          </a:prstGeom>
-          <a:noFill/>
-        </p:spPr>
-        <p:txBody>
-          <a:bodyPr wrap="square">
-            <a:spAutoFit/>
-          </a:bodyPr>
-          <a:lstStyle/>
-          <a:p>
-            <a:pPr algn="ctr"/>
-            <a:r>
-              <a:rPr sz="4400" b="1" i="0">
+            <a:off x="640080" y="2052828"/>
+            <a:ext cx="10911535" cy="731520"/>
+          </a:xfrm>
+          <a:prstGeom prst="rect">
+            <a:avLst/>
+          </a:prstGeom>
+          <a:noFill/>
+        </p:spPr>
+        <p:txBody>
+          <a:bodyPr wrap="square">
+            <a:spAutoFit/>
+          </a:bodyPr>
+          <a:lstStyle/>
+          <a:p>
+            <a:pPr algn="ctr"/>
+            <a:r>
+              <a:rPr sz="4800" b="1" i="0">
                 <a:solidFill>
                   <a:srgbClr val="FFFFFF"/>
                 </a:solidFill>
@@ -3900,99 +3830,29 @@
         </p:nvSpPr>
         <p:spPr>
           <a:xfrm>
-            <a:off x="594360" y="2980944"/>
-            <a:ext cx="11002975" cy="347472"/>
-          </a:xfrm>
-          <a:prstGeom prst="rect">
-            <a:avLst/>
-          </a:prstGeom>
-          <a:noFill/>
-        </p:spPr>
-        <p:txBody>
-          <a:bodyPr wrap="square">
-            <a:spAutoFit/>
-          </a:bodyPr>
-          <a:lstStyle/>
-          <a:p>
-            <a:pPr algn="ctr"/>
-            <a:r>
-              <a:rPr sz="2200" b="0" i="1">
-                <a:solidFill>
-                  <a:srgbClr val="8C8C8C"/>
-                </a:solidFill>
-                <a:latin typeface="Arial"/>
-              </a:rPr>
-              <a:t/>
-            </a:r>
-          </a:p>
-        </p:txBody>
-      </p:sp>
-      <p:sp>
-        <p:nvSpPr>
-          <p:cNvPr id="4" name="TextBox 3"/>
-          <p:cNvSpPr txBox="1"/>
-          <p:nvPr/>
-        </p:nvSpPr>
-        <p:spPr>
-          <a:xfrm>
-            <a:off x="594360" y="3529584"/>
-            <a:ext cx="11002975" cy="685800"/>
-          </a:xfrm>
-          <a:prstGeom prst="rect">
-            <a:avLst/>
-          </a:prstGeom>
-          <a:noFill/>
-        </p:spPr>
-        <p:txBody>
-          <a:bodyPr wrap="square">
-            <a:spAutoFit/>
-          </a:bodyPr>
-          <a:lstStyle/>
-          <a:p>
-            <a:pPr algn="ctr"/>
-            <a:r>
-              <a:rPr sz="4400" b="1" i="0">
+            <a:off x="640080" y="2985516"/>
+            <a:ext cx="10911535" cy="731520"/>
+          </a:xfrm>
+          <a:prstGeom prst="rect">
+            <a:avLst/>
+          </a:prstGeom>
+          <a:noFill/>
+        </p:spPr>
+        <p:txBody>
+          <a:bodyPr wrap="square">
+            <a:spAutoFit/>
+          </a:bodyPr>
+          <a:lstStyle/>
+          <a:p>
+            <a:pPr algn="ctr"/>
+            <a:r>
+              <a:rPr sz="4800" b="1" i="0">
                 <a:solidFill>
                   <a:srgbClr val="FFFFFF"/>
                 </a:solidFill>
                 <a:latin typeface="Arial"/>
               </a:rPr>
               <a:t>O céu é a nossa morada</a:t>
-            </a:r>
-          </a:p>
-        </p:txBody>
-      </p:sp>
-      <p:sp>
-        <p:nvSpPr>
-          <p:cNvPr id="5" name="TextBox 4"/>
-          <p:cNvSpPr txBox="1"/>
-          <p:nvPr/>
-        </p:nvSpPr>
-        <p:spPr>
-          <a:xfrm>
-            <a:off x="594360" y="4251960"/>
-            <a:ext cx="11002975" cy="347472"/>
-          </a:xfrm>
-          <a:prstGeom prst="rect">
-            <a:avLst/>
-          </a:prstGeom>
-          <a:noFill/>
-        </p:spPr>
-        <p:txBody>
-          <a:bodyPr wrap="square">
-            <a:spAutoFit/>
-          </a:bodyPr>
-          <a:lstStyle/>
-          <a:p>
-            <a:pPr algn="ctr"/>
-            <a:r>
-              <a:rPr sz="2200" b="0" i="1">
-                <a:solidFill>
-                  <a:srgbClr val="8C8C8C"/>
-                </a:solidFill>
-                <a:latin typeface="Arial"/>
-              </a:rPr>
-              <a:t/>
             </a:r>
           </a:p>
         </p:txBody>
@@ -4031,23 +3891,23 @@
         </p:nvSpPr>
         <p:spPr>
           <a:xfrm>
-            <a:off x="594360" y="2258568"/>
-            <a:ext cx="11002975" cy="685800"/>
-          </a:xfrm>
-          <a:prstGeom prst="rect">
-            <a:avLst/>
-          </a:prstGeom>
-          <a:noFill/>
-        </p:spPr>
-        <p:txBody>
-          <a:bodyPr wrap="square">
-            <a:spAutoFit/>
-          </a:bodyPr>
-          <a:lstStyle/>
-          <a:p>
-            <a:pPr algn="ctr"/>
-            <a:r>
-              <a:rPr sz="4400" b="1" i="0">
+            <a:off x="640080" y="2052828"/>
+            <a:ext cx="10911535" cy="731520"/>
+          </a:xfrm>
+          <a:prstGeom prst="rect">
+            <a:avLst/>
+          </a:prstGeom>
+          <a:noFill/>
+        </p:spPr>
+        <p:txBody>
+          <a:bodyPr wrap="square">
+            <a:spAutoFit/>
+          </a:bodyPr>
+          <a:lstStyle/>
+          <a:p>
+            <a:pPr algn="ctr"/>
+            <a:r>
+              <a:rPr sz="4800" b="1" i="0">
                 <a:solidFill>
                   <a:srgbClr val="FFFFFF"/>
                 </a:solidFill>
@@ -4066,29 +3926,29 @@
         </p:nvSpPr>
         <p:spPr>
           <a:xfrm>
-            <a:off x="594360" y="2980944"/>
-            <a:ext cx="11002975" cy="347472"/>
-          </a:xfrm>
-          <a:prstGeom prst="rect">
-            <a:avLst/>
-          </a:prstGeom>
-          <a:noFill/>
-        </p:spPr>
-        <p:txBody>
-          <a:bodyPr wrap="square">
-            <a:spAutoFit/>
-          </a:bodyPr>
-          <a:lstStyle/>
-          <a:p>
-            <a:pPr algn="ctr"/>
-            <a:r>
-              <a:rPr sz="2200" b="0" i="1">
-                <a:solidFill>
-                  <a:srgbClr val="8C8C8C"/>
-                </a:solidFill>
-                <a:latin typeface="Arial"/>
-              </a:rPr>
-              <a:t/>
+            <a:off x="640080" y="2985516"/>
+            <a:ext cx="10911535" cy="731520"/>
+          </a:xfrm>
+          <a:prstGeom prst="rect">
+            <a:avLst/>
+          </a:prstGeom>
+          <a:noFill/>
+        </p:spPr>
+        <p:txBody>
+          <a:bodyPr wrap="square">
+            <a:spAutoFit/>
+          </a:bodyPr>
+          <a:lstStyle/>
+          <a:p>
+            <a:pPr algn="ctr"/>
+            <a:r>
+              <a:rPr sz="4800" b="1" i="0">
+                <a:solidFill>
+                  <a:srgbClr val="FFFFFF"/>
+                </a:solidFill>
+                <a:latin typeface="Arial"/>
+              </a:rPr>
+              <a:t>A minha alma vai cantar</a:t>
             </a:r>
           </a:p>
         </p:txBody>
@@ -4101,29 +3961,29 @@
         </p:nvSpPr>
         <p:spPr>
           <a:xfrm>
-            <a:off x="594360" y="3529584"/>
-            <a:ext cx="11002975" cy="685800"/>
-          </a:xfrm>
-          <a:prstGeom prst="rect">
-            <a:avLst/>
-          </a:prstGeom>
-          <a:noFill/>
-        </p:spPr>
-        <p:txBody>
-          <a:bodyPr wrap="square">
-            <a:spAutoFit/>
-          </a:bodyPr>
-          <a:lstStyle/>
-          <a:p>
-            <a:pPr algn="ctr"/>
-            <a:r>
-              <a:rPr sz="4400" b="1" i="0">
-                <a:solidFill>
-                  <a:srgbClr val="FFFFFF"/>
-                </a:solidFill>
-                <a:latin typeface="Arial"/>
-              </a:rPr>
-              <a:t>A minha alma vai cantar</a:t>
+            <a:off x="640080" y="4128516"/>
+            <a:ext cx="10911535" cy="310896"/>
+          </a:xfrm>
+          <a:prstGeom prst="rect">
+            <a:avLst/>
+          </a:prstGeom>
+          <a:noFill/>
+        </p:spPr>
+        <p:txBody>
+          <a:bodyPr wrap="square">
+            <a:spAutoFit/>
+          </a:bodyPr>
+          <a:lstStyle/>
+          <a:p>
+            <a:pPr algn="ctr"/>
+            <a:r>
+              <a:rPr sz="2000" b="0" i="0">
+                <a:solidFill>
+                  <a:srgbClr val="828282"/>
+                </a:solidFill>
+                <a:latin typeface="Arial"/>
+              </a:rPr>
+              <a:t>十字架をみる        世界を背に</a:t>
             </a:r>
           </a:p>
         </p:txBody>
@@ -4136,29 +3996,29 @@
         </p:nvSpPr>
         <p:spPr>
           <a:xfrm>
-            <a:off x="594360" y="4251960"/>
-            <a:ext cx="11002975" cy="347472"/>
-          </a:xfrm>
-          <a:prstGeom prst="rect">
-            <a:avLst/>
-          </a:prstGeom>
-          <a:noFill/>
-        </p:spPr>
-        <p:txBody>
-          <a:bodyPr wrap="square">
-            <a:spAutoFit/>
-          </a:bodyPr>
-          <a:lstStyle/>
-          <a:p>
-            <a:pPr algn="ctr"/>
-            <a:r>
-              <a:rPr sz="2200" b="0" i="1">
-                <a:solidFill>
-                  <a:srgbClr val="8C8C8C"/>
-                </a:solidFill>
-                <a:latin typeface="Arial"/>
-              </a:rPr>
-              <a:t/>
+            <a:off x="640080" y="4494276"/>
+            <a:ext cx="10911535" cy="310896"/>
+          </a:xfrm>
+          <a:prstGeom prst="rect">
+            <a:avLst/>
+          </a:prstGeom>
+          <a:noFill/>
+        </p:spPr>
+        <p:txBody>
+          <a:bodyPr wrap="square">
+            <a:spAutoFit/>
+          </a:bodyPr>
+          <a:lstStyle/>
+          <a:p>
+            <a:pPr algn="ctr"/>
+            <a:r>
+              <a:rPr sz="2000" b="0" i="0">
+                <a:solidFill>
+                  <a:srgbClr val="828282"/>
+                </a:solidFill>
+                <a:latin typeface="Arial"/>
+              </a:rPr>
+              <a:t>振り向かない      振り向かない</a:t>
             </a:r>
           </a:p>
         </p:txBody>
@@ -4197,23 +4057,23 @@
         </p:nvSpPr>
         <p:spPr>
           <a:xfrm>
-            <a:off x="594360" y="2258568"/>
-            <a:ext cx="11002975" cy="685800"/>
-          </a:xfrm>
-          <a:prstGeom prst="rect">
-            <a:avLst/>
-          </a:prstGeom>
-          <a:noFill/>
-        </p:spPr>
-        <p:txBody>
-          <a:bodyPr wrap="square">
-            <a:spAutoFit/>
-          </a:bodyPr>
-          <a:lstStyle/>
-          <a:p>
-            <a:pPr algn="ctr"/>
-            <a:r>
-              <a:rPr sz="3805" b="1" i="0">
+            <a:off x="640080" y="2052828"/>
+            <a:ext cx="10911535" cy="731520"/>
+          </a:xfrm>
+          <a:prstGeom prst="rect">
+            <a:avLst/>
+          </a:prstGeom>
+          <a:noFill/>
+        </p:spPr>
+        <p:txBody>
+          <a:bodyPr wrap="square">
+            <a:spAutoFit/>
+          </a:bodyPr>
+          <a:lstStyle/>
+          <a:p>
+            <a:pPr algn="ctr"/>
+            <a:r>
+              <a:rPr sz="4100" b="1" i="0">
                 <a:solidFill>
                   <a:srgbClr val="FFFFFF"/>
                 </a:solidFill>
@@ -4232,29 +4092,29 @@
         </p:nvSpPr>
         <p:spPr>
           <a:xfrm>
-            <a:off x="594360" y="2980944"/>
-            <a:ext cx="11002975" cy="347472"/>
-          </a:xfrm>
-          <a:prstGeom prst="rect">
-            <a:avLst/>
-          </a:prstGeom>
-          <a:noFill/>
-        </p:spPr>
-        <p:txBody>
-          <a:bodyPr wrap="square">
-            <a:spAutoFit/>
-          </a:bodyPr>
-          <a:lstStyle/>
-          <a:p>
-            <a:pPr algn="ctr"/>
-            <a:r>
-              <a:rPr sz="2200" b="0" i="1">
-                <a:solidFill>
-                  <a:srgbClr val="8C8C8C"/>
-                </a:solidFill>
-                <a:latin typeface="Arial"/>
-              </a:rPr>
-              <a:t/>
+            <a:off x="640080" y="2985516"/>
+            <a:ext cx="10911535" cy="731520"/>
+          </a:xfrm>
+          <a:prstGeom prst="rect">
+            <a:avLst/>
+          </a:prstGeom>
+          <a:noFill/>
+        </p:spPr>
+        <p:txBody>
+          <a:bodyPr wrap="square">
+            <a:spAutoFit/>
+          </a:bodyPr>
+          <a:lstStyle/>
+          <a:p>
+            <a:pPr algn="ctr"/>
+            <a:r>
+              <a:rPr sz="4800" b="1" i="0">
+                <a:solidFill>
+                  <a:srgbClr val="FFFFFF"/>
+                </a:solidFill>
+                <a:latin typeface="Arial"/>
+              </a:rPr>
+              <a:t>Eu decidi seguir a Jesus</a:t>
             </a:r>
           </a:p>
         </p:txBody>
@@ -4267,29 +4127,29 @@
         </p:nvSpPr>
         <p:spPr>
           <a:xfrm>
-            <a:off x="594360" y="3529584"/>
-            <a:ext cx="11002975" cy="685800"/>
-          </a:xfrm>
-          <a:prstGeom prst="rect">
-            <a:avLst/>
-          </a:prstGeom>
-          <a:noFill/>
-        </p:spPr>
-        <p:txBody>
-          <a:bodyPr wrap="square">
-            <a:spAutoFit/>
-          </a:bodyPr>
-          <a:lstStyle/>
-          <a:p>
-            <a:pPr algn="ctr"/>
-            <a:r>
-              <a:rPr sz="4400" b="1" i="0">
-                <a:solidFill>
-                  <a:srgbClr val="FFFFFF"/>
-                </a:solidFill>
-                <a:latin typeface="Arial"/>
-              </a:rPr>
-              <a:t>Eu decidi seguir a Jesus</a:t>
+            <a:off x="640080" y="4128516"/>
+            <a:ext cx="10911535" cy="310896"/>
+          </a:xfrm>
+          <a:prstGeom prst="rect">
+            <a:avLst/>
+          </a:prstGeom>
+          <a:noFill/>
+        </p:spPr>
+        <p:txBody>
+          <a:bodyPr wrap="square">
+            <a:spAutoFit/>
+          </a:bodyPr>
+          <a:lstStyle/>
+          <a:p>
+            <a:pPr algn="ctr"/>
+            <a:r>
+              <a:rPr sz="2000" b="0" i="0">
+                <a:solidFill>
+                  <a:srgbClr val="828282"/>
+                </a:solidFill>
+                <a:latin typeface="Arial"/>
+              </a:rPr>
+              <a:t>十字架をみる        世界を背に</a:t>
             </a:r>
           </a:p>
         </p:txBody>
@@ -4302,29 +4162,29 @@
         </p:nvSpPr>
         <p:spPr>
           <a:xfrm>
-            <a:off x="594360" y="4251960"/>
-            <a:ext cx="11002975" cy="347472"/>
-          </a:xfrm>
-          <a:prstGeom prst="rect">
-            <a:avLst/>
-          </a:prstGeom>
-          <a:noFill/>
-        </p:spPr>
-        <p:txBody>
-          <a:bodyPr wrap="square">
-            <a:spAutoFit/>
-          </a:bodyPr>
-          <a:lstStyle/>
-          <a:p>
-            <a:pPr algn="ctr"/>
-            <a:r>
-              <a:rPr sz="2200" b="0" i="1">
-                <a:solidFill>
-                  <a:srgbClr val="8C8C8C"/>
-                </a:solidFill>
-                <a:latin typeface="Arial"/>
-              </a:rPr>
-              <a:t/>
+            <a:off x="640080" y="4494276"/>
+            <a:ext cx="10911535" cy="310896"/>
+          </a:xfrm>
+          <a:prstGeom prst="rect">
+            <a:avLst/>
+          </a:prstGeom>
+          <a:noFill/>
+        </p:spPr>
+        <p:txBody>
+          <a:bodyPr wrap="square">
+            <a:spAutoFit/>
+          </a:bodyPr>
+          <a:lstStyle/>
+          <a:p>
+            <a:pPr algn="ctr"/>
+            <a:r>
+              <a:rPr sz="2000" b="0" i="0">
+                <a:solidFill>
+                  <a:srgbClr val="828282"/>
+                </a:solidFill>
+                <a:latin typeface="Arial"/>
+              </a:rPr>
+              <a:t>振り向かない    振り向かない</a:t>
             </a:r>
           </a:p>
         </p:txBody>
@@ -4363,23 +4223,23 @@
         </p:nvSpPr>
         <p:spPr>
           <a:xfrm>
-            <a:off x="594360" y="2258568"/>
-            <a:ext cx="11002975" cy="685800"/>
-          </a:xfrm>
-          <a:prstGeom prst="rect">
-            <a:avLst/>
-          </a:prstGeom>
-          <a:noFill/>
-        </p:spPr>
-        <p:txBody>
-          <a:bodyPr wrap="square">
-            <a:spAutoFit/>
-          </a:bodyPr>
-          <a:lstStyle/>
-          <a:p>
-            <a:pPr algn="ctr"/>
-            <a:r>
-              <a:rPr sz="4400" b="1" i="0">
+            <a:off x="640080" y="2052828"/>
+            <a:ext cx="10911535" cy="731520"/>
+          </a:xfrm>
+          <a:prstGeom prst="rect">
+            <a:avLst/>
+          </a:prstGeom>
+          <a:noFill/>
+        </p:spPr>
+        <p:txBody>
+          <a:bodyPr wrap="square">
+            <a:spAutoFit/>
+          </a:bodyPr>
+          <a:lstStyle/>
+          <a:p>
+            <a:pPr algn="ctr"/>
+            <a:r>
+              <a:rPr sz="4800" b="1" i="0">
                 <a:solidFill>
                   <a:srgbClr val="FFFFFF"/>
                 </a:solidFill>
@@ -4398,99 +4258,29 @@
         </p:nvSpPr>
         <p:spPr>
           <a:xfrm>
-            <a:off x="594360" y="2980944"/>
-            <a:ext cx="11002975" cy="347472"/>
-          </a:xfrm>
-          <a:prstGeom prst="rect">
-            <a:avLst/>
-          </a:prstGeom>
-          <a:noFill/>
-        </p:spPr>
-        <p:txBody>
-          <a:bodyPr wrap="square">
-            <a:spAutoFit/>
-          </a:bodyPr>
-          <a:lstStyle/>
-          <a:p>
-            <a:pPr algn="ctr"/>
-            <a:r>
-              <a:rPr sz="2200" b="0" i="1">
-                <a:solidFill>
-                  <a:srgbClr val="8C8C8C"/>
-                </a:solidFill>
-                <a:latin typeface="Arial"/>
-              </a:rPr>
-              <a:t/>
-            </a:r>
-          </a:p>
-        </p:txBody>
-      </p:sp>
-      <p:sp>
-        <p:nvSpPr>
-          <p:cNvPr id="4" name="TextBox 3"/>
-          <p:cNvSpPr txBox="1"/>
-          <p:nvPr/>
-        </p:nvSpPr>
-        <p:spPr>
-          <a:xfrm>
-            <a:off x="594360" y="3529584"/>
-            <a:ext cx="11002975" cy="685800"/>
-          </a:xfrm>
-          <a:prstGeom prst="rect">
-            <a:avLst/>
-          </a:prstGeom>
-          <a:noFill/>
-        </p:spPr>
-        <p:txBody>
-          <a:bodyPr wrap="square">
-            <a:spAutoFit/>
-          </a:bodyPr>
-          <a:lstStyle/>
-          <a:p>
-            <a:pPr algn="ctr"/>
-            <a:r>
-              <a:rPr sz="4400" b="1" i="0">
+            <a:off x="640080" y="2985516"/>
+            <a:ext cx="10911535" cy="731520"/>
+          </a:xfrm>
+          <a:prstGeom prst="rect">
+            <a:avLst/>
+          </a:prstGeom>
+          <a:noFill/>
+        </p:spPr>
+        <p:txBody>
+          <a:bodyPr wrap="square">
+            <a:spAutoFit/>
+          </a:bodyPr>
+          <a:lstStyle/>
+          <a:p>
+            <a:pPr algn="ctr"/>
+            <a:r>
+              <a:rPr sz="4800" b="1" i="0">
                 <a:solidFill>
                   <a:srgbClr val="FFFFFF"/>
                 </a:solidFill>
                 <a:latin typeface="Arial"/>
               </a:rPr>
               <a:t>A cruz à minha frente</a:t>
-            </a:r>
-          </a:p>
-        </p:txBody>
-      </p:sp>
-      <p:sp>
-        <p:nvSpPr>
-          <p:cNvPr id="5" name="TextBox 4"/>
-          <p:cNvSpPr txBox="1"/>
-          <p:nvPr/>
-        </p:nvSpPr>
-        <p:spPr>
-          <a:xfrm>
-            <a:off x="594360" y="4251960"/>
-            <a:ext cx="11002975" cy="347472"/>
-          </a:xfrm>
-          <a:prstGeom prst="rect">
-            <a:avLst/>
-          </a:prstGeom>
-          <a:noFill/>
-        </p:spPr>
-        <p:txBody>
-          <a:bodyPr wrap="square">
-            <a:spAutoFit/>
-          </a:bodyPr>
-          <a:lstStyle/>
-          <a:p>
-            <a:pPr algn="ctr"/>
-            <a:r>
-              <a:rPr sz="2200" b="0" i="1">
-                <a:solidFill>
-                  <a:srgbClr val="8C8C8C"/>
-                </a:solidFill>
-                <a:latin typeface="Arial"/>
-              </a:rPr>
-              <a:t/>
             </a:r>
           </a:p>
         </p:txBody>
@@ -4529,23 +4319,23 @@
         </p:nvSpPr>
         <p:spPr>
           <a:xfrm>
-            <a:off x="594360" y="2258568"/>
-            <a:ext cx="11002975" cy="685800"/>
-          </a:xfrm>
-          <a:prstGeom prst="rect">
-            <a:avLst/>
-          </a:prstGeom>
-          <a:noFill/>
-        </p:spPr>
-        <p:txBody>
-          <a:bodyPr wrap="square">
-            <a:spAutoFit/>
-          </a:bodyPr>
-          <a:lstStyle/>
-          <a:p>
-            <a:pPr algn="ctr"/>
-            <a:r>
-              <a:rPr sz="4400" b="1" i="0">
+            <a:off x="640080" y="2052828"/>
+            <a:ext cx="10911535" cy="731520"/>
+          </a:xfrm>
+          <a:prstGeom prst="rect">
+            <a:avLst/>
+          </a:prstGeom>
+          <a:noFill/>
+        </p:spPr>
+        <p:txBody>
+          <a:bodyPr wrap="square">
+            <a:spAutoFit/>
+          </a:bodyPr>
+          <a:lstStyle/>
+          <a:p>
+            <a:pPr algn="ctr"/>
+            <a:r>
+              <a:rPr sz="4800" b="1" i="0">
                 <a:solidFill>
                   <a:srgbClr val="FFFFFF"/>
                 </a:solidFill>
@@ -4564,29 +4354,29 @@
         </p:nvSpPr>
         <p:spPr>
           <a:xfrm>
-            <a:off x="594360" y="2980944"/>
-            <a:ext cx="11002975" cy="347472"/>
-          </a:xfrm>
-          <a:prstGeom prst="rect">
-            <a:avLst/>
-          </a:prstGeom>
-          <a:noFill/>
-        </p:spPr>
-        <p:txBody>
-          <a:bodyPr wrap="square">
-            <a:spAutoFit/>
-          </a:bodyPr>
-          <a:lstStyle/>
-          <a:p>
-            <a:pPr algn="ctr"/>
-            <a:r>
-              <a:rPr sz="2200" b="0" i="1">
-                <a:solidFill>
-                  <a:srgbClr val="8C8C8C"/>
-                </a:solidFill>
-                <a:latin typeface="Arial"/>
-              </a:rPr>
-              <a:t/>
+            <a:off x="640080" y="2985516"/>
+            <a:ext cx="10911535" cy="731520"/>
+          </a:xfrm>
+          <a:prstGeom prst="rect">
+            <a:avLst/>
+          </a:prstGeom>
+          <a:noFill/>
+        </p:spPr>
+        <p:txBody>
+          <a:bodyPr wrap="square">
+            <a:spAutoFit/>
+          </a:bodyPr>
+          <a:lstStyle/>
+          <a:p>
+            <a:pPr algn="ctr"/>
+            <a:r>
+              <a:rPr sz="3800" b="1" i="0">
+                <a:solidFill>
+                  <a:srgbClr val="FFFFFF"/>
+                </a:solidFill>
+                <a:latin typeface="Arial"/>
+              </a:rPr>
+              <a:t>Não tem volta, eu fui posto em liberdade</a:t>
             </a:r>
           </a:p>
         </p:txBody>
@@ -4599,29 +4389,29 @@
         </p:nvSpPr>
         <p:spPr>
           <a:xfrm>
-            <a:off x="594360" y="3529584"/>
-            <a:ext cx="11002975" cy="685800"/>
-          </a:xfrm>
-          <a:prstGeom prst="rect">
-            <a:avLst/>
-          </a:prstGeom>
-          <a:noFill/>
-        </p:spPr>
-        <p:txBody>
-          <a:bodyPr wrap="square">
-            <a:spAutoFit/>
-          </a:bodyPr>
-          <a:lstStyle/>
-          <a:p>
-            <a:pPr algn="ctr"/>
-            <a:r>
-              <a:rPr sz="3520" b="1" i="0">
-                <a:solidFill>
-                  <a:srgbClr val="FFFFFF"/>
-                </a:solidFill>
-                <a:latin typeface="Arial"/>
-              </a:rPr>
-              <a:t>Não tem volta, eu fui posto em liberdade</a:t>
+            <a:off x="640080" y="4128516"/>
+            <a:ext cx="10911535" cy="310896"/>
+          </a:xfrm>
+          <a:prstGeom prst="rect">
+            <a:avLst/>
+          </a:prstGeom>
+          <a:noFill/>
+        </p:spPr>
+        <p:txBody>
+          <a:bodyPr wrap="square">
+            <a:spAutoFit/>
+          </a:bodyPr>
+          <a:lstStyle/>
+          <a:p>
+            <a:pPr algn="ctr"/>
+            <a:r>
+              <a:rPr sz="2000" b="0" i="0">
+                <a:solidFill>
+                  <a:srgbClr val="828282"/>
+                </a:solidFill>
+                <a:latin typeface="Arial"/>
+              </a:rPr>
+              <a:t>キリストにだけ       必要なものが</a:t>
             </a:r>
           </a:p>
         </p:txBody>
@@ -4634,29 +4424,29 @@
         </p:nvSpPr>
         <p:spPr>
           <a:xfrm>
-            <a:off x="594360" y="4251960"/>
-            <a:ext cx="11002975" cy="347472"/>
-          </a:xfrm>
-          <a:prstGeom prst="rect">
-            <a:avLst/>
-          </a:prstGeom>
-          <a:noFill/>
-        </p:spPr>
-        <p:txBody>
-          <a:bodyPr wrap="square">
-            <a:spAutoFit/>
-          </a:bodyPr>
-          <a:lstStyle/>
-          <a:p>
-            <a:pPr algn="ctr"/>
-            <a:r>
-              <a:rPr sz="2200" b="0" i="1">
-                <a:solidFill>
-                  <a:srgbClr val="8C8C8C"/>
-                </a:solidFill>
-                <a:latin typeface="Arial"/>
-              </a:rPr>
-              <a:t/>
+            <a:off x="640080" y="4494276"/>
+            <a:ext cx="10911535" cy="310896"/>
+          </a:xfrm>
+          <a:prstGeom prst="rect">
+            <a:avLst/>
+          </a:prstGeom>
+          <a:noFill/>
+        </p:spPr>
+        <p:txBody>
+          <a:bodyPr wrap="square">
+            <a:spAutoFit/>
+          </a:bodyPr>
+          <a:lstStyle/>
+          <a:p>
+            <a:pPr algn="ctr"/>
+            <a:r>
+              <a:rPr sz="2000" b="0" i="0">
+                <a:solidFill>
+                  <a:srgbClr val="828282"/>
+                </a:solidFill>
+                <a:latin typeface="Arial"/>
+              </a:rPr>
+              <a:t>すべてある 十分に 　すべてある</a:t>
             </a:r>
           </a:p>
         </p:txBody>
@@ -4695,23 +4485,23 @@
         </p:nvSpPr>
         <p:spPr>
           <a:xfrm>
-            <a:off x="594360" y="2258568"/>
-            <a:ext cx="11002975" cy="685800"/>
-          </a:xfrm>
-          <a:prstGeom prst="rect">
-            <a:avLst/>
-          </a:prstGeom>
-          <a:noFill/>
-        </p:spPr>
-        <p:txBody>
-          <a:bodyPr wrap="square">
-            <a:spAutoFit/>
-          </a:bodyPr>
-          <a:lstStyle/>
-          <a:p>
-            <a:pPr algn="ctr"/>
-            <a:r>
-              <a:rPr sz="4400" b="1" i="0">
+            <a:off x="640080" y="2052828"/>
+            <a:ext cx="10911535" cy="731520"/>
+          </a:xfrm>
+          <a:prstGeom prst="rect">
+            <a:avLst/>
+          </a:prstGeom>
+          <a:noFill/>
+        </p:spPr>
+        <p:txBody>
+          <a:bodyPr wrap="square">
+            <a:spAutoFit/>
+          </a:bodyPr>
+          <a:lstStyle/>
+          <a:p>
+            <a:pPr algn="ctr"/>
+            <a:r>
+              <a:rPr sz="4800" b="1" i="0">
                 <a:solidFill>
                   <a:srgbClr val="FFFFFF"/>
                 </a:solidFill>
@@ -4730,29 +4520,29 @@
         </p:nvSpPr>
         <p:spPr>
           <a:xfrm>
-            <a:off x="594360" y="2980944"/>
-            <a:ext cx="11002975" cy="347472"/>
-          </a:xfrm>
-          <a:prstGeom prst="rect">
-            <a:avLst/>
-          </a:prstGeom>
-          <a:noFill/>
-        </p:spPr>
-        <p:txBody>
-          <a:bodyPr wrap="square">
-            <a:spAutoFit/>
-          </a:bodyPr>
-          <a:lstStyle/>
-          <a:p>
-            <a:pPr algn="ctr"/>
-            <a:r>
-              <a:rPr sz="2200" b="0" i="1">
-                <a:solidFill>
-                  <a:srgbClr val="8C8C8C"/>
-                </a:solidFill>
-                <a:latin typeface="Arial"/>
-              </a:rPr>
-              <a:t/>
+            <a:off x="640080" y="2985516"/>
+            <a:ext cx="10911535" cy="731520"/>
+          </a:xfrm>
+          <a:prstGeom prst="rect">
+            <a:avLst/>
+          </a:prstGeom>
+          <a:noFill/>
+        </p:spPr>
+        <p:txBody>
+          <a:bodyPr wrap="square">
+            <a:spAutoFit/>
+          </a:bodyPr>
+          <a:lstStyle/>
+          <a:p>
+            <a:pPr algn="ctr"/>
+            <a:r>
+              <a:rPr sz="4800" b="1" i="0">
+                <a:solidFill>
+                  <a:srgbClr val="FFFFFF"/>
+                </a:solidFill>
+                <a:latin typeface="Arial"/>
+              </a:rPr>
+              <a:t>Cristo é suficiente para mim</a:t>
             </a:r>
           </a:p>
         </p:txBody>
@@ -4765,29 +4555,29 @@
         </p:nvSpPr>
         <p:spPr>
           <a:xfrm>
-            <a:off x="594360" y="3529584"/>
-            <a:ext cx="11002975" cy="685800"/>
-          </a:xfrm>
-          <a:prstGeom prst="rect">
-            <a:avLst/>
-          </a:prstGeom>
-          <a:noFill/>
-        </p:spPr>
-        <p:txBody>
-          <a:bodyPr wrap="square">
-            <a:spAutoFit/>
-          </a:bodyPr>
-          <a:lstStyle/>
-          <a:p>
-            <a:pPr algn="ctr"/>
-            <a:r>
-              <a:rPr sz="4400" b="1" i="0">
-                <a:solidFill>
-                  <a:srgbClr val="FFFFFF"/>
-                </a:solidFill>
-                <a:latin typeface="Arial"/>
-              </a:rPr>
-              <a:t>Cristo é suficiente para mim</a:t>
+            <a:off x="640080" y="4128516"/>
+            <a:ext cx="10911535" cy="310896"/>
+          </a:xfrm>
+          <a:prstGeom prst="rect">
+            <a:avLst/>
+          </a:prstGeom>
+          <a:noFill/>
+        </p:spPr>
+        <p:txBody>
+          <a:bodyPr wrap="square">
+            <a:spAutoFit/>
+          </a:bodyPr>
+          <a:lstStyle/>
+          <a:p>
+            <a:pPr algn="ctr"/>
+            <a:r>
+              <a:rPr sz="2000" b="0" i="0">
+                <a:solidFill>
+                  <a:srgbClr val="828282"/>
+                </a:solidFill>
+                <a:latin typeface="Arial"/>
+              </a:rPr>
+              <a:t>キリストにだけ       必要なものが</a:t>
             </a:r>
           </a:p>
         </p:txBody>
@@ -4800,29 +4590,29 @@
         </p:nvSpPr>
         <p:spPr>
           <a:xfrm>
-            <a:off x="594360" y="4251960"/>
-            <a:ext cx="11002975" cy="347472"/>
-          </a:xfrm>
-          <a:prstGeom prst="rect">
-            <a:avLst/>
-          </a:prstGeom>
-          <a:noFill/>
-        </p:spPr>
-        <p:txBody>
-          <a:bodyPr wrap="square">
-            <a:spAutoFit/>
-          </a:bodyPr>
-          <a:lstStyle/>
-          <a:p>
-            <a:pPr algn="ctr"/>
-            <a:r>
-              <a:rPr sz="2200" b="0" i="1">
-                <a:solidFill>
-                  <a:srgbClr val="8C8C8C"/>
-                </a:solidFill>
-                <a:latin typeface="Arial"/>
-              </a:rPr>
-              <a:t/>
+            <a:off x="640080" y="4494276"/>
+            <a:ext cx="10911535" cy="310896"/>
+          </a:xfrm>
+          <a:prstGeom prst="rect">
+            <a:avLst/>
+          </a:prstGeom>
+          <a:noFill/>
+        </p:spPr>
+        <p:txBody>
+          <a:bodyPr wrap="square">
+            <a:spAutoFit/>
+          </a:bodyPr>
+          <a:lstStyle/>
+          <a:p>
+            <a:pPr algn="ctr"/>
+            <a:r>
+              <a:rPr sz="2000" b="0" i="0">
+                <a:solidFill>
+                  <a:srgbClr val="828282"/>
+                </a:solidFill>
+                <a:latin typeface="Arial"/>
+              </a:rPr>
+              <a:t>すべてある 十分に 　すべてある</a:t>
             </a:r>
           </a:p>
         </p:txBody>
@@ -4861,23 +4651,23 @@
         </p:nvSpPr>
         <p:spPr>
           <a:xfrm>
-            <a:off x="594360" y="2258568"/>
-            <a:ext cx="11002975" cy="685800"/>
-          </a:xfrm>
-          <a:prstGeom prst="rect">
-            <a:avLst/>
-          </a:prstGeom>
-          <a:noFill/>
-        </p:spPr>
-        <p:txBody>
-          <a:bodyPr wrap="square">
-            <a:spAutoFit/>
-          </a:bodyPr>
-          <a:lstStyle/>
-          <a:p>
-            <a:pPr algn="ctr"/>
-            <a:r>
-              <a:rPr sz="4400" b="1" i="0">
+            <a:off x="640080" y="2052828"/>
+            <a:ext cx="10911535" cy="731520"/>
+          </a:xfrm>
+          <a:prstGeom prst="rect">
+            <a:avLst/>
+          </a:prstGeom>
+          <a:noFill/>
+        </p:spPr>
+        <p:txBody>
+          <a:bodyPr wrap="square">
+            <a:spAutoFit/>
+          </a:bodyPr>
+          <a:lstStyle/>
+          <a:p>
+            <a:pPr algn="ctr"/>
+            <a:r>
+              <a:rPr sz="4800" b="1" i="0">
                 <a:solidFill>
                   <a:srgbClr val="FFFFFF"/>
                 </a:solidFill>
@@ -4896,99 +4686,29 @@
         </p:nvSpPr>
         <p:spPr>
           <a:xfrm>
-            <a:off x="594360" y="2980944"/>
-            <a:ext cx="11002975" cy="347472"/>
-          </a:xfrm>
-          <a:prstGeom prst="rect">
-            <a:avLst/>
-          </a:prstGeom>
-          <a:noFill/>
-        </p:spPr>
-        <p:txBody>
-          <a:bodyPr wrap="square">
-            <a:spAutoFit/>
-          </a:bodyPr>
-          <a:lstStyle/>
-          <a:p>
-            <a:pPr algn="ctr"/>
-            <a:r>
-              <a:rPr sz="2200" b="0" i="1">
-                <a:solidFill>
-                  <a:srgbClr val="8C8C8C"/>
-                </a:solidFill>
-                <a:latin typeface="Arial"/>
-              </a:rPr>
-              <a:t/>
-            </a:r>
-          </a:p>
-        </p:txBody>
-      </p:sp>
-      <p:sp>
-        <p:nvSpPr>
-          <p:cNvPr id="4" name="TextBox 3"/>
-          <p:cNvSpPr txBox="1"/>
-          <p:nvPr/>
-        </p:nvSpPr>
-        <p:spPr>
-          <a:xfrm>
-            <a:off x="594360" y="3529584"/>
-            <a:ext cx="11002975" cy="685800"/>
-          </a:xfrm>
-          <a:prstGeom prst="rect">
-            <a:avLst/>
-          </a:prstGeom>
-          <a:noFill/>
-        </p:spPr>
-        <p:txBody>
-          <a:bodyPr wrap="square">
-            <a:spAutoFit/>
-          </a:bodyPr>
-          <a:lstStyle/>
-          <a:p>
-            <a:pPr algn="ctr"/>
-            <a:r>
-              <a:rPr sz="3911" b="1" i="0">
+            <a:off x="640080" y="2985516"/>
+            <a:ext cx="10911535" cy="731520"/>
+          </a:xfrm>
+          <a:prstGeom prst="rect">
+            <a:avLst/>
+          </a:prstGeom>
+          <a:noFill/>
+        </p:spPr>
+        <p:txBody>
+          <a:bodyPr wrap="square">
+            <a:spAutoFit/>
+          </a:bodyPr>
+          <a:lstStyle/>
+          <a:p>
+            <a:pPr algn="ctr"/>
+            <a:r>
+              <a:rPr sz="4200" b="1" i="0">
                 <a:solidFill>
                   <a:srgbClr val="FFFFFF"/>
                 </a:solidFill>
                 <a:latin typeface="Arial"/>
               </a:rPr>
               <a:t>Não tem volta, não pode voltar atrás</a:t>
-            </a:r>
-          </a:p>
-        </p:txBody>
-      </p:sp>
-      <p:sp>
-        <p:nvSpPr>
-          <p:cNvPr id="5" name="TextBox 4"/>
-          <p:cNvSpPr txBox="1"/>
-          <p:nvPr/>
-        </p:nvSpPr>
-        <p:spPr>
-          <a:xfrm>
-            <a:off x="594360" y="4251960"/>
-            <a:ext cx="11002975" cy="347472"/>
-          </a:xfrm>
-          <a:prstGeom prst="rect">
-            <a:avLst/>
-          </a:prstGeom>
-          <a:noFill/>
-        </p:spPr>
-        <p:txBody>
-          <a:bodyPr wrap="square">
-            <a:spAutoFit/>
-          </a:bodyPr>
-          <a:lstStyle/>
-          <a:p>
-            <a:pPr algn="ctr"/>
-            <a:r>
-              <a:rPr sz="2200" b="0" i="1">
-                <a:solidFill>
-                  <a:srgbClr val="8C8C8C"/>
-                </a:solidFill>
-                <a:latin typeface="Arial"/>
-              </a:rPr>
-              <a:t/>
             </a:r>
           </a:p>
         </p:txBody>
@@ -5027,23 +4747,23 @@
         </p:nvSpPr>
         <p:spPr>
           <a:xfrm>
-            <a:off x="594360" y="2258568"/>
-            <a:ext cx="11002975" cy="685800"/>
-          </a:xfrm>
-          <a:prstGeom prst="rect">
-            <a:avLst/>
-          </a:prstGeom>
-          <a:noFill/>
-        </p:spPr>
-        <p:txBody>
-          <a:bodyPr wrap="square">
-            <a:spAutoFit/>
-          </a:bodyPr>
-          <a:lstStyle/>
-          <a:p>
-            <a:pPr algn="ctr"/>
-            <a:r>
-              <a:rPr sz="4400" b="1" i="0">
+            <a:off x="640080" y="2052828"/>
+            <a:ext cx="10911535" cy="731520"/>
+          </a:xfrm>
+          <a:prstGeom prst="rect">
+            <a:avLst/>
+          </a:prstGeom>
+          <a:noFill/>
+        </p:spPr>
+        <p:txBody>
+          <a:bodyPr wrap="square">
+            <a:spAutoFit/>
+          </a:bodyPr>
+          <a:lstStyle/>
+          <a:p>
+            <a:pPr algn="ctr"/>
+            <a:r>
+              <a:rPr sz="4800" b="1" i="0">
                 <a:solidFill>
                   <a:srgbClr val="FFFFFF"/>
                 </a:solidFill>
@@ -5062,99 +4782,29 @@
         </p:nvSpPr>
         <p:spPr>
           <a:xfrm>
-            <a:off x="594360" y="2980944"/>
-            <a:ext cx="11002975" cy="347472"/>
-          </a:xfrm>
-          <a:prstGeom prst="rect">
-            <a:avLst/>
-          </a:prstGeom>
-          <a:noFill/>
-        </p:spPr>
-        <p:txBody>
-          <a:bodyPr wrap="square">
-            <a:spAutoFit/>
-          </a:bodyPr>
-          <a:lstStyle/>
-          <a:p>
-            <a:pPr algn="ctr"/>
-            <a:r>
-              <a:rPr sz="2200" b="0" i="1">
-                <a:solidFill>
-                  <a:srgbClr val="8C8C8C"/>
-                </a:solidFill>
-                <a:latin typeface="Arial"/>
-              </a:rPr>
-              <a:t/>
-            </a:r>
-          </a:p>
-        </p:txBody>
-      </p:sp>
-      <p:sp>
-        <p:nvSpPr>
-          <p:cNvPr id="4" name="TextBox 3"/>
-          <p:cNvSpPr txBox="1"/>
-          <p:nvPr/>
-        </p:nvSpPr>
-        <p:spPr>
-          <a:xfrm>
-            <a:off x="594360" y="3529584"/>
-            <a:ext cx="11002975" cy="685800"/>
-          </a:xfrm>
-          <a:prstGeom prst="rect">
-            <a:avLst/>
-          </a:prstGeom>
-          <a:noFill/>
-        </p:spPr>
-        <p:txBody>
-          <a:bodyPr wrap="square">
-            <a:spAutoFit/>
-          </a:bodyPr>
-          <a:lstStyle/>
-          <a:p>
-            <a:pPr algn="ctr"/>
-            <a:r>
-              <a:rPr sz="4400" b="1" i="0">
+            <a:off x="640080" y="2985516"/>
+            <a:ext cx="10911535" cy="731520"/>
+          </a:xfrm>
+          <a:prstGeom prst="rect">
+            <a:avLst/>
+          </a:prstGeom>
+          <a:noFill/>
+        </p:spPr>
+        <p:txBody>
+          <a:bodyPr wrap="square">
+            <a:spAutoFit/>
+          </a:bodyPr>
+          <a:lstStyle/>
+          <a:p>
+            <a:pPr algn="ctr"/>
+            <a:r>
+              <a:rPr sz="4800" b="1" i="0">
                 <a:solidFill>
                   <a:srgbClr val="FFFFFF"/>
                 </a:solidFill>
                 <a:latin typeface="Arial"/>
               </a:rPr>
               <a:t>Agora não há nada neste mundo</a:t>
-            </a:r>
-          </a:p>
-        </p:txBody>
-      </p:sp>
-      <p:sp>
-        <p:nvSpPr>
-          <p:cNvPr id="5" name="TextBox 4"/>
-          <p:cNvSpPr txBox="1"/>
-          <p:nvPr/>
-        </p:nvSpPr>
-        <p:spPr>
-          <a:xfrm>
-            <a:off x="594360" y="4251960"/>
-            <a:ext cx="11002975" cy="347472"/>
-          </a:xfrm>
-          <a:prstGeom prst="rect">
-            <a:avLst/>
-          </a:prstGeom>
-          <a:noFill/>
-        </p:spPr>
-        <p:txBody>
-          <a:bodyPr wrap="square">
-            <a:spAutoFit/>
-          </a:bodyPr>
-          <a:lstStyle/>
-          <a:p>
-            <a:pPr algn="ctr"/>
-            <a:r>
-              <a:rPr sz="2200" b="0" i="1">
-                <a:solidFill>
-                  <a:srgbClr val="8C8C8C"/>
-                </a:solidFill>
-                <a:latin typeface="Arial"/>
-              </a:rPr>
-              <a:t/>
             </a:r>
           </a:p>
         </p:txBody>
@@ -5193,23 +4843,23 @@
         </p:nvSpPr>
         <p:spPr>
           <a:xfrm>
-            <a:off x="594360" y="2258568"/>
-            <a:ext cx="11002975" cy="685800"/>
-          </a:xfrm>
-          <a:prstGeom prst="rect">
-            <a:avLst/>
-          </a:prstGeom>
-          <a:noFill/>
-        </p:spPr>
-        <p:txBody>
-          <a:bodyPr wrap="square">
-            <a:spAutoFit/>
-          </a:bodyPr>
-          <a:lstStyle/>
-          <a:p>
-            <a:pPr algn="ctr"/>
-            <a:r>
-              <a:rPr sz="4400" b="1" i="0">
+            <a:off x="640080" y="2052828"/>
+            <a:ext cx="10911535" cy="731520"/>
+          </a:xfrm>
+          <a:prstGeom prst="rect">
+            <a:avLst/>
+          </a:prstGeom>
+          <a:noFill/>
+        </p:spPr>
+        <p:txBody>
+          <a:bodyPr wrap="square">
+            <a:spAutoFit/>
+          </a:bodyPr>
+          <a:lstStyle/>
+          <a:p>
+            <a:pPr algn="ctr"/>
+            <a:r>
+              <a:rPr sz="4800" b="1" i="0">
                 <a:solidFill>
                   <a:srgbClr val="FFFFFF"/>
                 </a:solidFill>
@@ -5228,99 +4878,29 @@
         </p:nvSpPr>
         <p:spPr>
           <a:xfrm>
-            <a:off x="594360" y="2980944"/>
-            <a:ext cx="11002975" cy="347472"/>
-          </a:xfrm>
-          <a:prstGeom prst="rect">
-            <a:avLst/>
-          </a:prstGeom>
-          <a:noFill/>
-        </p:spPr>
-        <p:txBody>
-          <a:bodyPr wrap="square">
-            <a:spAutoFit/>
-          </a:bodyPr>
-          <a:lstStyle/>
-          <a:p>
-            <a:pPr algn="ctr"/>
-            <a:r>
-              <a:rPr sz="2200" b="0" i="1">
-                <a:solidFill>
-                  <a:srgbClr val="8C8C8C"/>
-                </a:solidFill>
-                <a:latin typeface="Arial"/>
-              </a:rPr>
-              <a:t/>
-            </a:r>
-          </a:p>
-        </p:txBody>
-      </p:sp>
-      <p:sp>
-        <p:nvSpPr>
-          <p:cNvPr id="4" name="TextBox 3"/>
-          <p:cNvSpPr txBox="1"/>
-          <p:nvPr/>
-        </p:nvSpPr>
-        <p:spPr>
-          <a:xfrm>
-            <a:off x="594360" y="3529584"/>
-            <a:ext cx="11002975" cy="685800"/>
-          </a:xfrm>
-          <a:prstGeom prst="rect">
-            <a:avLst/>
-          </a:prstGeom>
-          <a:noFill/>
-        </p:spPr>
-        <p:txBody>
-          <a:bodyPr wrap="square">
-            <a:spAutoFit/>
-          </a:bodyPr>
-          <a:lstStyle/>
-          <a:p>
-            <a:pPr algn="ctr"/>
-            <a:r>
-              <a:rPr sz="3911" b="1" i="0">
+            <a:off x="640080" y="2985516"/>
+            <a:ext cx="10911535" cy="731520"/>
+          </a:xfrm>
+          <a:prstGeom prst="rect">
+            <a:avLst/>
+          </a:prstGeom>
+          <a:noFill/>
+        </p:spPr>
+        <p:txBody>
+          <a:bodyPr wrap="square">
+            <a:spAutoFit/>
+          </a:bodyPr>
+          <a:lstStyle/>
+          <a:p>
+            <a:pPr algn="ctr"/>
+            <a:r>
+              <a:rPr sz="4200" b="1" i="0">
                 <a:solidFill>
                   <a:srgbClr val="FFFFFF"/>
                 </a:solidFill>
                 <a:latin typeface="Arial"/>
               </a:rPr>
               <a:t>Não tem volta, não pode voltar atrás</a:t>
-            </a:r>
-          </a:p>
-        </p:txBody>
-      </p:sp>
-      <p:sp>
-        <p:nvSpPr>
-          <p:cNvPr id="5" name="TextBox 4"/>
-          <p:cNvSpPr txBox="1"/>
-          <p:nvPr/>
-        </p:nvSpPr>
-        <p:spPr>
-          <a:xfrm>
-            <a:off x="594360" y="4251960"/>
-            <a:ext cx="11002975" cy="347472"/>
-          </a:xfrm>
-          <a:prstGeom prst="rect">
-            <a:avLst/>
-          </a:prstGeom>
-          <a:noFill/>
-        </p:spPr>
-        <p:txBody>
-          <a:bodyPr wrap="square">
-            <a:spAutoFit/>
-          </a:bodyPr>
-          <a:lstStyle/>
-          <a:p>
-            <a:pPr algn="ctr"/>
-            <a:r>
-              <a:rPr sz="2200" b="0" i="1">
-                <a:solidFill>
-                  <a:srgbClr val="8C8C8C"/>
-                </a:solidFill>
-                <a:latin typeface="Arial"/>
-              </a:rPr>
-              <a:t/>
             </a:r>
           </a:p>
         </p:txBody>
@@ -5359,23 +4939,23 @@
         </p:nvSpPr>
         <p:spPr>
           <a:xfrm>
-            <a:off x="594360" y="1837944"/>
-            <a:ext cx="11002975" cy="685800"/>
-          </a:xfrm>
-          <a:prstGeom prst="rect">
-            <a:avLst/>
-          </a:prstGeom>
-          <a:noFill/>
-        </p:spPr>
-        <p:txBody>
-          <a:bodyPr wrap="square">
-            <a:spAutoFit/>
-          </a:bodyPr>
-          <a:lstStyle/>
-          <a:p>
-            <a:pPr algn="ctr"/>
-            <a:r>
-              <a:rPr sz="4400" b="1" i="0">
+            <a:off x="640080" y="1650492"/>
+            <a:ext cx="10911535" cy="731520"/>
+          </a:xfrm>
+          <a:prstGeom prst="rect">
+            <a:avLst/>
+          </a:prstGeom>
+          <a:noFill/>
+        </p:spPr>
+        <p:txBody>
+          <a:bodyPr wrap="square">
+            <a:spAutoFit/>
+          </a:bodyPr>
+          <a:lstStyle/>
+          <a:p>
+            <a:pPr algn="ctr"/>
+            <a:r>
+              <a:rPr sz="4800" b="1" i="0">
                 <a:solidFill>
                   <a:srgbClr val="FFFFFF"/>
                 </a:solidFill>
@@ -5394,8 +4974,8 @@
         </p:nvSpPr>
         <p:spPr>
           <a:xfrm>
-            <a:off x="594360" y="2560320"/>
-            <a:ext cx="11002975" cy="384048"/>
+            <a:off x="640080" y="2418588"/>
+            <a:ext cx="10911535" cy="365760"/>
           </a:xfrm>
           <a:prstGeom prst="rect">
             <a:avLst/>
@@ -5412,7 +4992,7 @@
             <a:r>
               <a:rPr sz="2400" b="0" i="1">
                 <a:solidFill>
-                  <a:srgbClr val="B4B4B4"/>
+                  <a:srgbClr val="AAAAAA"/>
                 </a:solidFill>
                 <a:latin typeface="Arial"/>
               </a:rPr>
@@ -5429,8 +5009,78 @@
         </p:nvSpPr>
         <p:spPr>
           <a:xfrm>
-            <a:off x="594360" y="2980944"/>
-            <a:ext cx="11002975" cy="347472"/>
+            <a:off x="640080" y="2985516"/>
+            <a:ext cx="10911535" cy="731520"/>
+          </a:xfrm>
+          <a:prstGeom prst="rect">
+            <a:avLst/>
+          </a:prstGeom>
+          <a:noFill/>
+        </p:spPr>
+        <p:txBody>
+          <a:bodyPr wrap="square">
+            <a:spAutoFit/>
+          </a:bodyPr>
+          <a:lstStyle/>
+          <a:p>
+            <a:pPr algn="ctr"/>
+            <a:r>
+              <a:rPr sz="4800" b="1" i="0">
+                <a:solidFill>
+                  <a:srgbClr val="FFFFFF"/>
+                </a:solidFill>
+                <a:latin typeface="Arial"/>
+              </a:rPr>
+              <a:t>すべてある 十分に 　すべてある</a:t>
+            </a:r>
+          </a:p>
+        </p:txBody>
+      </p:sp>
+      <p:sp>
+        <p:nvSpPr>
+          <p:cNvPr id="5" name="TextBox 4"/>
+          <p:cNvSpPr txBox="1"/>
+          <p:nvPr/>
+        </p:nvSpPr>
+        <p:spPr>
+          <a:xfrm>
+            <a:off x="640080" y="3753612"/>
+            <a:ext cx="10911535" cy="365760"/>
+          </a:xfrm>
+          <a:prstGeom prst="rect">
+            <a:avLst/>
+          </a:prstGeom>
+          <a:noFill/>
+        </p:spPr>
+        <p:txBody>
+          <a:bodyPr wrap="square">
+            <a:spAutoFit/>
+          </a:bodyPr>
+          <a:lstStyle/>
+          <a:p>
+            <a:pPr algn="ctr"/>
+            <a:r>
+              <a:rPr sz="2400" b="0" i="1">
+                <a:solidFill>
+                  <a:srgbClr val="AAAAAA"/>
+                </a:solidFill>
+                <a:latin typeface="Arial"/>
+              </a:rPr>
+              <a:t>subetearu juubun ni subetearu</a:t>
+            </a:r>
+          </a:p>
+        </p:txBody>
+      </p:sp>
+      <p:sp>
+        <p:nvSpPr>
+          <p:cNvPr id="6" name="TextBox 5"/>
+          <p:cNvSpPr txBox="1"/>
+          <p:nvPr/>
+        </p:nvSpPr>
+        <p:spPr>
+          <a:xfrm>
+            <a:off x="640080" y="4530852"/>
+            <a:ext cx="10911535" cy="310896"/>
           </a:xfrm>
           <a:prstGeom prst="rect">
             <a:avLst/>
@@ -5447,81 +5097,11 @@
             <a:r>
               <a:rPr sz="2000" b="0" i="1">
                 <a:solidFill>
-                  <a:srgbClr val="8C8C8C"/>
-                </a:solidFill>
-                <a:latin typeface="Arial"/>
-              </a:rPr>
-              <a:t/>
-            </a:r>
-          </a:p>
-        </p:txBody>
-      </p:sp>
-      <p:sp>
-        <p:nvSpPr>
-          <p:cNvPr id="5" name="TextBox 4"/>
-          <p:cNvSpPr txBox="1"/>
-          <p:nvPr/>
-        </p:nvSpPr>
-        <p:spPr>
-          <a:xfrm>
-            <a:off x="594360" y="3529584"/>
-            <a:ext cx="11002975" cy="685800"/>
-          </a:xfrm>
-          <a:prstGeom prst="rect">
-            <a:avLst/>
-          </a:prstGeom>
-          <a:noFill/>
-        </p:spPr>
-        <p:txBody>
-          <a:bodyPr wrap="square">
-            <a:spAutoFit/>
-          </a:bodyPr>
-          <a:lstStyle/>
-          <a:p>
-            <a:pPr algn="ctr"/>
-            <a:r>
-              <a:rPr sz="4400" b="1" i="0">
-                <a:solidFill>
-                  <a:srgbClr val="FFFFFF"/>
-                </a:solidFill>
-                <a:latin typeface="Arial"/>
-              </a:rPr>
-              <a:t>すべてある 十分に 　すべてある</a:t>
-            </a:r>
-          </a:p>
-        </p:txBody>
-      </p:sp>
-      <p:sp>
-        <p:nvSpPr>
-          <p:cNvPr id="6" name="TextBox 5"/>
-          <p:cNvSpPr txBox="1"/>
-          <p:nvPr/>
-        </p:nvSpPr>
-        <p:spPr>
-          <a:xfrm>
-            <a:off x="594360" y="4251960"/>
-            <a:ext cx="11002975" cy="384048"/>
-          </a:xfrm>
-          <a:prstGeom prst="rect">
-            <a:avLst/>
-          </a:prstGeom>
-          <a:noFill/>
-        </p:spPr>
-        <p:txBody>
-          <a:bodyPr wrap="square">
-            <a:spAutoFit/>
-          </a:bodyPr>
-          <a:lstStyle/>
-          <a:p>
-            <a:pPr algn="ctr"/>
-            <a:r>
-              <a:rPr sz="2400" b="0" i="1">
-                <a:solidFill>
-                  <a:srgbClr val="B4B4B4"/>
-                </a:solidFill>
-                <a:latin typeface="Arial"/>
-              </a:rPr>
-              <a:t>subetearu juubun ni subetearu</a:t>
+                  <a:srgbClr val="828282"/>
+                </a:solidFill>
+                <a:latin typeface="Arial"/>
+              </a:rPr>
+              <a:t>A minha alma vai cantar</a:t>
             </a:r>
           </a:p>
         </p:txBody>
@@ -5534,8 +5114,8 @@
         </p:nvSpPr>
         <p:spPr>
           <a:xfrm>
-            <a:off x="594360" y="4672584"/>
-            <a:ext cx="11002975" cy="347472"/>
+            <a:off x="640080" y="4896612"/>
+            <a:ext cx="10911535" cy="310896"/>
           </a:xfrm>
           <a:prstGeom prst="rect">
             <a:avLst/>
@@ -5552,11 +5132,11 @@
             <a:r>
               <a:rPr sz="2000" b="0" i="1">
                 <a:solidFill>
-                  <a:srgbClr val="8C8C8C"/>
-                </a:solidFill>
-                <a:latin typeface="Arial"/>
-              </a:rPr>
-              <a:t/>
+                  <a:srgbClr val="828282"/>
+                </a:solidFill>
+                <a:latin typeface="Arial"/>
+              </a:rPr>
+              <a:t>Não tem volta, eu fui posto em liberdade</a:t>
             </a:r>
           </a:p>
         </p:txBody>
@@ -5595,23 +5175,23 @@
         </p:nvSpPr>
         <p:spPr>
           <a:xfrm>
-            <a:off x="594360" y="1837944"/>
-            <a:ext cx="11002975" cy="685800"/>
-          </a:xfrm>
-          <a:prstGeom prst="rect">
-            <a:avLst/>
-          </a:prstGeom>
-          <a:noFill/>
-        </p:spPr>
-        <p:txBody>
-          <a:bodyPr wrap="square">
-            <a:spAutoFit/>
-          </a:bodyPr>
-          <a:lstStyle/>
-          <a:p>
-            <a:pPr algn="ctr"/>
-            <a:r>
-              <a:rPr sz="4400" b="1" i="0">
+            <a:off x="640080" y="1650492"/>
+            <a:ext cx="10911535" cy="731520"/>
+          </a:xfrm>
+          <a:prstGeom prst="rect">
+            <a:avLst/>
+          </a:prstGeom>
+          <a:noFill/>
+        </p:spPr>
+        <p:txBody>
+          <a:bodyPr wrap="square">
+            <a:spAutoFit/>
+          </a:bodyPr>
+          <a:lstStyle/>
+          <a:p>
+            <a:pPr algn="ctr"/>
+            <a:r>
+              <a:rPr sz="4800" b="1" i="0">
                 <a:solidFill>
                   <a:srgbClr val="FFFFFF"/>
                 </a:solidFill>
@@ -5630,8 +5210,8 @@
         </p:nvSpPr>
         <p:spPr>
           <a:xfrm>
-            <a:off x="594360" y="2560320"/>
-            <a:ext cx="11002975" cy="384048"/>
+            <a:off x="640080" y="2418588"/>
+            <a:ext cx="10911535" cy="365760"/>
           </a:xfrm>
           <a:prstGeom prst="rect">
             <a:avLst/>
@@ -5648,7 +5228,7 @@
             <a:r>
               <a:rPr sz="2400" b="0" i="1">
                 <a:solidFill>
-                  <a:srgbClr val="B4B4B4"/>
+                  <a:srgbClr val="AAAAAA"/>
                 </a:solidFill>
                 <a:latin typeface="Arial"/>
               </a:rPr>
@@ -5665,8 +5245,78 @@
         </p:nvSpPr>
         <p:spPr>
           <a:xfrm>
-            <a:off x="594360" y="2980944"/>
-            <a:ext cx="11002975" cy="347472"/>
+            <a:off x="640080" y="2985516"/>
+            <a:ext cx="10911535" cy="731520"/>
+          </a:xfrm>
+          <a:prstGeom prst="rect">
+            <a:avLst/>
+          </a:prstGeom>
+          <a:noFill/>
+        </p:spPr>
+        <p:txBody>
+          <a:bodyPr wrap="square">
+            <a:spAutoFit/>
+          </a:bodyPr>
+          <a:lstStyle/>
+          <a:p>
+            <a:pPr algn="ctr"/>
+            <a:r>
+              <a:rPr sz="4800" b="1" i="0">
+                <a:solidFill>
+                  <a:srgbClr val="FFFFFF"/>
+                </a:solidFill>
+                <a:latin typeface="Arial"/>
+              </a:rPr>
+              <a:t>振り向かない         振り向かない</a:t>
+            </a:r>
+          </a:p>
+        </p:txBody>
+      </p:sp>
+      <p:sp>
+        <p:nvSpPr>
+          <p:cNvPr id="5" name="TextBox 4"/>
+          <p:cNvSpPr txBox="1"/>
+          <p:nvPr/>
+        </p:nvSpPr>
+        <p:spPr>
+          <a:xfrm>
+            <a:off x="640080" y="3753612"/>
+            <a:ext cx="10911535" cy="365760"/>
+          </a:xfrm>
+          <a:prstGeom prst="rect">
+            <a:avLst/>
+          </a:prstGeom>
+          <a:noFill/>
+        </p:spPr>
+        <p:txBody>
+          <a:bodyPr wrap="square">
+            <a:spAutoFit/>
+          </a:bodyPr>
+          <a:lstStyle/>
+          <a:p>
+            <a:pPr algn="ctr"/>
+            <a:r>
+              <a:rPr sz="2400" b="0" i="1">
+                <a:solidFill>
+                  <a:srgbClr val="AAAAAA"/>
+                </a:solidFill>
+                <a:latin typeface="Arial"/>
+              </a:rPr>
+              <a:t>furimukanai furimukanai</a:t>
+            </a:r>
+          </a:p>
+        </p:txBody>
+      </p:sp>
+      <p:sp>
+        <p:nvSpPr>
+          <p:cNvPr id="6" name="TextBox 5"/>
+          <p:cNvSpPr txBox="1"/>
+          <p:nvPr/>
+        </p:nvSpPr>
+        <p:spPr>
+          <a:xfrm>
+            <a:off x="640080" y="4530852"/>
+            <a:ext cx="10911535" cy="310896"/>
           </a:xfrm>
           <a:prstGeom prst="rect">
             <a:avLst/>
@@ -5683,81 +5333,11 @@
             <a:r>
               <a:rPr sz="2000" b="0" i="1">
                 <a:solidFill>
-                  <a:srgbClr val="8C8C8C"/>
-                </a:solidFill>
-                <a:latin typeface="Arial"/>
-              </a:rPr>
-              <a:t/>
-            </a:r>
-          </a:p>
-        </p:txBody>
-      </p:sp>
-      <p:sp>
-        <p:nvSpPr>
-          <p:cNvPr id="5" name="TextBox 4"/>
-          <p:cNvSpPr txBox="1"/>
-          <p:nvPr/>
-        </p:nvSpPr>
-        <p:spPr>
-          <a:xfrm>
-            <a:off x="594360" y="3529584"/>
-            <a:ext cx="11002975" cy="685800"/>
-          </a:xfrm>
-          <a:prstGeom prst="rect">
-            <a:avLst/>
-          </a:prstGeom>
-          <a:noFill/>
-        </p:spPr>
-        <p:txBody>
-          <a:bodyPr wrap="square">
-            <a:spAutoFit/>
-          </a:bodyPr>
-          <a:lstStyle/>
-          <a:p>
-            <a:pPr algn="ctr"/>
-            <a:r>
-              <a:rPr sz="4400" b="1" i="0">
-                <a:solidFill>
-                  <a:srgbClr val="FFFFFF"/>
-                </a:solidFill>
-                <a:latin typeface="Arial"/>
-              </a:rPr>
-              <a:t>振り向かない         振り向かない</a:t>
-            </a:r>
-          </a:p>
-        </p:txBody>
-      </p:sp>
-      <p:sp>
-        <p:nvSpPr>
-          <p:cNvPr id="6" name="TextBox 5"/>
-          <p:cNvSpPr txBox="1"/>
-          <p:nvPr/>
-        </p:nvSpPr>
-        <p:spPr>
-          <a:xfrm>
-            <a:off x="594360" y="4251960"/>
-            <a:ext cx="11002975" cy="384048"/>
-          </a:xfrm>
-          <a:prstGeom prst="rect">
-            <a:avLst/>
-          </a:prstGeom>
-          <a:noFill/>
-        </p:spPr>
-        <p:txBody>
-          <a:bodyPr wrap="square">
-            <a:spAutoFit/>
-          </a:bodyPr>
-          <a:lstStyle/>
-          <a:p>
-            <a:pPr algn="ctr"/>
-            <a:r>
-              <a:rPr sz="2400" b="0" i="1">
-                <a:solidFill>
-                  <a:srgbClr val="B4B4B4"/>
-                </a:solidFill>
-                <a:latin typeface="Arial"/>
-              </a:rPr>
-              <a:t>furimukanai furimukanai</a:t>
+                  <a:srgbClr val="828282"/>
+                </a:solidFill>
+                <a:latin typeface="Arial"/>
+              </a:rPr>
+              <a:t>Tudo o que eu preciso está em Ti</a:t>
             </a:r>
           </a:p>
         </p:txBody>
@@ -5770,8 +5350,8 @@
         </p:nvSpPr>
         <p:spPr>
           <a:xfrm>
-            <a:off x="594360" y="4672584"/>
-            <a:ext cx="11002975" cy="347472"/>
+            <a:off x="640080" y="4896612"/>
+            <a:ext cx="10911535" cy="310896"/>
           </a:xfrm>
           <a:prstGeom prst="rect">
             <a:avLst/>
@@ -5788,11 +5368,11 @@
             <a:r>
               <a:rPr sz="2000" b="0" i="1">
                 <a:solidFill>
-                  <a:srgbClr val="8C8C8C"/>
-                </a:solidFill>
-                <a:latin typeface="Arial"/>
-              </a:rPr>
-              <a:t/>
+                  <a:srgbClr val="828282"/>
+                </a:solidFill>
+                <a:latin typeface="Arial"/>
+              </a:rPr>
+              <a:t>Tudo o que eu preciso</a:t>
             </a:r>
           </a:p>
         </p:txBody>
@@ -5831,23 +5411,23 @@
         </p:nvSpPr>
         <p:spPr>
           <a:xfrm>
-            <a:off x="594360" y="1837944"/>
-            <a:ext cx="11002975" cy="685800"/>
-          </a:xfrm>
-          <a:prstGeom prst="rect">
-            <a:avLst/>
-          </a:prstGeom>
-          <a:noFill/>
-        </p:spPr>
-        <p:txBody>
-          <a:bodyPr wrap="square">
-            <a:spAutoFit/>
-          </a:bodyPr>
-          <a:lstStyle/>
-          <a:p>
-            <a:pPr algn="ctr"/>
-            <a:r>
-              <a:rPr sz="4400" b="1" i="0">
+            <a:off x="640080" y="1650492"/>
+            <a:ext cx="10911535" cy="731520"/>
+          </a:xfrm>
+          <a:prstGeom prst="rect">
+            <a:avLst/>
+          </a:prstGeom>
+          <a:noFill/>
+        </p:spPr>
+        <p:txBody>
+          <a:bodyPr wrap="square">
+            <a:spAutoFit/>
+          </a:bodyPr>
+          <a:lstStyle/>
+          <a:p>
+            <a:pPr algn="ctr"/>
+            <a:r>
+              <a:rPr sz="4800" b="1" i="0">
                 <a:solidFill>
                   <a:srgbClr val="FFFFFF"/>
                 </a:solidFill>
@@ -5866,8 +5446,8 @@
         </p:nvSpPr>
         <p:spPr>
           <a:xfrm>
-            <a:off x="594360" y="2560320"/>
-            <a:ext cx="11002975" cy="384048"/>
+            <a:off x="640080" y="2418588"/>
+            <a:ext cx="10911535" cy="365760"/>
           </a:xfrm>
           <a:prstGeom prst="rect">
             <a:avLst/>
@@ -5884,7 +5464,7 @@
             <a:r>
               <a:rPr sz="2400" b="0" i="1">
                 <a:solidFill>
-                  <a:srgbClr val="B4B4B4"/>
+                  <a:srgbClr val="AAAAAA"/>
                 </a:solidFill>
                 <a:latin typeface="Arial"/>
               </a:rPr>
@@ -5901,8 +5481,78 @@
         </p:nvSpPr>
         <p:spPr>
           <a:xfrm>
-            <a:off x="594360" y="2980944"/>
-            <a:ext cx="11002975" cy="347472"/>
+            <a:off x="640080" y="2985516"/>
+            <a:ext cx="10911535" cy="731520"/>
+          </a:xfrm>
+          <a:prstGeom prst="rect">
+            <a:avLst/>
+          </a:prstGeom>
+          <a:noFill/>
+        </p:spPr>
+        <p:txBody>
+          <a:bodyPr wrap="square">
+            <a:spAutoFit/>
+          </a:bodyPr>
+          <a:lstStyle/>
+          <a:p>
+            <a:pPr algn="ctr"/>
+            <a:r>
+              <a:rPr sz="4800" b="1" i="0">
+                <a:solidFill>
+                  <a:srgbClr val="FFFFFF"/>
+                </a:solidFill>
+                <a:latin typeface="Arial"/>
+              </a:rPr>
+              <a:t>振り向かない    振り向かない</a:t>
+            </a:r>
+          </a:p>
+        </p:txBody>
+      </p:sp>
+      <p:sp>
+        <p:nvSpPr>
+          <p:cNvPr id="5" name="TextBox 4"/>
+          <p:cNvSpPr txBox="1"/>
+          <p:nvPr/>
+        </p:nvSpPr>
+        <p:spPr>
+          <a:xfrm>
+            <a:off x="640080" y="3753612"/>
+            <a:ext cx="10911535" cy="365760"/>
+          </a:xfrm>
+          <a:prstGeom prst="rect">
+            <a:avLst/>
+          </a:prstGeom>
+          <a:noFill/>
+        </p:spPr>
+        <p:txBody>
+          <a:bodyPr wrap="square">
+            <a:spAutoFit/>
+          </a:bodyPr>
+          <a:lstStyle/>
+          <a:p>
+            <a:pPr algn="ctr"/>
+            <a:r>
+              <a:rPr sz="2400" b="0" i="1">
+                <a:solidFill>
+                  <a:srgbClr val="AAAAAA"/>
+                </a:solidFill>
+                <a:latin typeface="Arial"/>
+              </a:rPr>
+              <a:t>furimuka nai furimukanai</a:t>
+            </a:r>
+          </a:p>
+        </p:txBody>
+      </p:sp>
+      <p:sp>
+        <p:nvSpPr>
+          <p:cNvPr id="6" name="TextBox 5"/>
+          <p:cNvSpPr txBox="1"/>
+          <p:nvPr/>
+        </p:nvSpPr>
+        <p:spPr>
+          <a:xfrm>
+            <a:off x="640080" y="4530852"/>
+            <a:ext cx="10911535" cy="310896"/>
           </a:xfrm>
           <a:prstGeom prst="rect">
             <a:avLst/>
@@ -5919,81 +5569,11 @@
             <a:r>
               <a:rPr sz="2000" b="0" i="1">
                 <a:solidFill>
-                  <a:srgbClr val="8C8C8C"/>
-                </a:solidFill>
-                <a:latin typeface="Arial"/>
-              </a:rPr>
-              <a:t/>
-            </a:r>
-          </a:p>
-        </p:txBody>
-      </p:sp>
-      <p:sp>
-        <p:nvSpPr>
-          <p:cNvPr id="5" name="TextBox 4"/>
-          <p:cNvSpPr txBox="1"/>
-          <p:nvPr/>
-        </p:nvSpPr>
-        <p:spPr>
-          <a:xfrm>
-            <a:off x="594360" y="3529584"/>
-            <a:ext cx="11002975" cy="685800"/>
-          </a:xfrm>
-          <a:prstGeom prst="rect">
-            <a:avLst/>
-          </a:prstGeom>
-          <a:noFill/>
-        </p:spPr>
-        <p:txBody>
-          <a:bodyPr wrap="square">
-            <a:spAutoFit/>
-          </a:bodyPr>
-          <a:lstStyle/>
-          <a:p>
-            <a:pPr algn="ctr"/>
-            <a:r>
-              <a:rPr sz="4400" b="1" i="0">
-                <a:solidFill>
-                  <a:srgbClr val="FFFFFF"/>
-                </a:solidFill>
-                <a:latin typeface="Arial"/>
-              </a:rPr>
-              <a:t>振り向かない    振り向かない</a:t>
-            </a:r>
-          </a:p>
-        </p:txBody>
-      </p:sp>
-      <p:sp>
-        <p:nvSpPr>
-          <p:cNvPr id="6" name="TextBox 5"/>
-          <p:cNvSpPr txBox="1"/>
-          <p:nvPr/>
-        </p:nvSpPr>
-        <p:spPr>
-          <a:xfrm>
-            <a:off x="594360" y="4251960"/>
-            <a:ext cx="11002975" cy="384048"/>
-          </a:xfrm>
-          <a:prstGeom prst="rect">
-            <a:avLst/>
-          </a:prstGeom>
-          <a:noFill/>
-        </p:spPr>
-        <p:txBody>
-          <a:bodyPr wrap="square">
-            <a:spAutoFit/>
-          </a:bodyPr>
-          <a:lstStyle/>
-          <a:p>
-            <a:pPr algn="ctr"/>
-            <a:r>
-              <a:rPr sz="2400" b="0" i="1">
-                <a:solidFill>
-                  <a:srgbClr val="B4B4B4"/>
-                </a:solidFill>
-                <a:latin typeface="Arial"/>
-              </a:rPr>
-              <a:t>furimuka nai furimukanai</a:t>
+                  <a:srgbClr val="828282"/>
+                </a:solidFill>
+                <a:latin typeface="Arial"/>
+              </a:rPr>
+              <a:t>Cristo, meu tudo em tudo</a:t>
             </a:r>
           </a:p>
         </p:txBody>
@@ -6006,8 +5586,8 @@
         </p:nvSpPr>
         <p:spPr>
           <a:xfrm>
-            <a:off x="594360" y="4672584"/>
-            <a:ext cx="11002975" cy="347472"/>
+            <a:off x="640080" y="4896612"/>
+            <a:ext cx="10911535" cy="310896"/>
           </a:xfrm>
           <a:prstGeom prst="rect">
             <a:avLst/>
@@ -6024,11 +5604,11 @@
             <a:r>
               <a:rPr sz="2000" b="0" i="1">
                 <a:solidFill>
-                  <a:srgbClr val="8C8C8C"/>
-                </a:solidFill>
-                <a:latin typeface="Arial"/>
-              </a:rPr>
-              <a:t/>
+                  <a:srgbClr val="828282"/>
+                </a:solidFill>
+                <a:latin typeface="Arial"/>
+              </a:rPr>
+              <a:t>A alegria da minha salvação</a:t>
             </a:r>
           </a:p>
         </p:txBody>
@@ -6067,23 +5647,23 @@
         </p:nvSpPr>
         <p:spPr>
           <a:xfrm>
-            <a:off x="594360" y="1837944"/>
-            <a:ext cx="11002975" cy="685800"/>
-          </a:xfrm>
-          <a:prstGeom prst="rect">
-            <a:avLst/>
-          </a:prstGeom>
-          <a:noFill/>
-        </p:spPr>
-        <p:txBody>
-          <a:bodyPr wrap="square">
-            <a:spAutoFit/>
-          </a:bodyPr>
-          <a:lstStyle/>
-          <a:p>
-            <a:pPr algn="ctr"/>
-            <a:r>
-              <a:rPr sz="4400" b="1" i="0">
+            <a:off x="640080" y="1650492"/>
+            <a:ext cx="10911535" cy="731520"/>
+          </a:xfrm>
+          <a:prstGeom prst="rect">
+            <a:avLst/>
+          </a:prstGeom>
+          <a:noFill/>
+        </p:spPr>
+        <p:txBody>
+          <a:bodyPr wrap="square">
+            <a:spAutoFit/>
+          </a:bodyPr>
+          <a:lstStyle/>
+          <a:p>
+            <a:pPr algn="ctr"/>
+            <a:r>
+              <a:rPr sz="4800" b="1" i="0">
                 <a:solidFill>
                   <a:srgbClr val="FFFFFF"/>
                 </a:solidFill>
@@ -6102,8 +5682,8 @@
         </p:nvSpPr>
         <p:spPr>
           <a:xfrm>
-            <a:off x="594360" y="2560320"/>
-            <a:ext cx="11002975" cy="384048"/>
+            <a:off x="640080" y="2418588"/>
+            <a:ext cx="10911535" cy="365760"/>
           </a:xfrm>
           <a:prstGeom prst="rect">
             <a:avLst/>
@@ -6120,7 +5700,7 @@
             <a:r>
               <a:rPr sz="2400" b="0" i="1">
                 <a:solidFill>
-                  <a:srgbClr val="B4B4B4"/>
+                  <a:srgbClr val="AAAAAA"/>
                 </a:solidFill>
                 <a:latin typeface="Arial"/>
               </a:rPr>
@@ -6137,8 +5717,78 @@
         </p:nvSpPr>
         <p:spPr>
           <a:xfrm>
-            <a:off x="594360" y="2980944"/>
-            <a:ext cx="11002975" cy="347472"/>
+            <a:off x="640080" y="2985516"/>
+            <a:ext cx="10911535" cy="731520"/>
+          </a:xfrm>
+          <a:prstGeom prst="rect">
+            <a:avLst/>
+          </a:prstGeom>
+          <a:noFill/>
+        </p:spPr>
+        <p:txBody>
+          <a:bodyPr wrap="square">
+            <a:spAutoFit/>
+          </a:bodyPr>
+          <a:lstStyle/>
+          <a:p>
+            <a:pPr algn="ctr"/>
+            <a:r>
+              <a:rPr sz="4800" b="1" i="0">
+                <a:solidFill>
+                  <a:srgbClr val="FFFFFF"/>
+                </a:solidFill>
+                <a:latin typeface="Arial"/>
+              </a:rPr>
+              <a:t>振り向かない      振り向かない</a:t>
+            </a:r>
+          </a:p>
+        </p:txBody>
+      </p:sp>
+      <p:sp>
+        <p:nvSpPr>
+          <p:cNvPr id="5" name="TextBox 4"/>
+          <p:cNvSpPr txBox="1"/>
+          <p:nvPr/>
+        </p:nvSpPr>
+        <p:spPr>
+          <a:xfrm>
+            <a:off x="640080" y="3753612"/>
+            <a:ext cx="10911535" cy="365760"/>
+          </a:xfrm>
+          <a:prstGeom prst="rect">
+            <a:avLst/>
+          </a:prstGeom>
+          <a:noFill/>
+        </p:spPr>
+        <p:txBody>
+          <a:bodyPr wrap="square">
+            <a:spAutoFit/>
+          </a:bodyPr>
+          <a:lstStyle/>
+          <a:p>
+            <a:pPr algn="ctr"/>
+            <a:r>
+              <a:rPr sz="2400" b="0" i="1">
+                <a:solidFill>
+                  <a:srgbClr val="AAAAAA"/>
+                </a:solidFill>
+                <a:latin typeface="Arial"/>
+              </a:rPr>
+              <a:t>furimuka nai furimukanai</a:t>
+            </a:r>
+          </a:p>
+        </p:txBody>
+      </p:sp>
+      <p:sp>
+        <p:nvSpPr>
+          <p:cNvPr id="6" name="TextBox 5"/>
+          <p:cNvSpPr txBox="1"/>
+          <p:nvPr/>
+        </p:nvSpPr>
+        <p:spPr>
+          <a:xfrm>
+            <a:off x="640080" y="4530852"/>
+            <a:ext cx="10911535" cy="310896"/>
           </a:xfrm>
           <a:prstGeom prst="rect">
             <a:avLst/>
@@ -6155,81 +5805,11 @@
             <a:r>
               <a:rPr sz="2000" b="0" i="1">
                 <a:solidFill>
-                  <a:srgbClr val="8C8C8C"/>
-                </a:solidFill>
-                <a:latin typeface="Arial"/>
-              </a:rPr>
-              <a:t/>
-            </a:r>
-          </a:p>
-        </p:txBody>
-      </p:sp>
-      <p:sp>
-        <p:nvSpPr>
-          <p:cNvPr id="5" name="TextBox 4"/>
-          <p:cNvSpPr txBox="1"/>
-          <p:nvPr/>
-        </p:nvSpPr>
-        <p:spPr>
-          <a:xfrm>
-            <a:off x="594360" y="3529584"/>
-            <a:ext cx="11002975" cy="685800"/>
-          </a:xfrm>
-          <a:prstGeom prst="rect">
-            <a:avLst/>
-          </a:prstGeom>
-          <a:noFill/>
-        </p:spPr>
-        <p:txBody>
-          <a:bodyPr wrap="square">
-            <a:spAutoFit/>
-          </a:bodyPr>
-          <a:lstStyle/>
-          <a:p>
-            <a:pPr algn="ctr"/>
-            <a:r>
-              <a:rPr sz="4400" b="1" i="0">
-                <a:solidFill>
-                  <a:srgbClr val="FFFFFF"/>
-                </a:solidFill>
-                <a:latin typeface="Arial"/>
-              </a:rPr>
-              <a:t>振り向かない      振り向かない</a:t>
-            </a:r>
-          </a:p>
-        </p:txBody>
-      </p:sp>
-      <p:sp>
-        <p:nvSpPr>
-          <p:cNvPr id="6" name="TextBox 5"/>
-          <p:cNvSpPr txBox="1"/>
-          <p:nvPr/>
-        </p:nvSpPr>
-        <p:spPr>
-          <a:xfrm>
-            <a:off x="594360" y="4251960"/>
-            <a:ext cx="11002975" cy="384048"/>
-          </a:xfrm>
-          <a:prstGeom prst="rect">
-            <a:avLst/>
-          </a:prstGeom>
-          <a:noFill/>
-        </p:spPr>
-        <p:txBody>
-          <a:bodyPr wrap="square">
-            <a:spAutoFit/>
-          </a:bodyPr>
-          <a:lstStyle/>
-          <a:p>
-            <a:pPr algn="ctr"/>
-            <a:r>
-              <a:rPr sz="2400" b="0" i="1">
-                <a:solidFill>
-                  <a:srgbClr val="B4B4B4"/>
-                </a:solidFill>
-                <a:latin typeface="Arial"/>
-              </a:rPr>
-              <a:t>furimuka nai furimukanai</a:t>
+                  <a:srgbClr val="828282"/>
+                </a:solidFill>
+                <a:latin typeface="Arial"/>
+              </a:rPr>
+              <a:t>Através de cada tempestade</a:t>
             </a:r>
           </a:p>
         </p:txBody>
@@ -6242,8 +5822,8 @@
         </p:nvSpPr>
         <p:spPr>
           <a:xfrm>
-            <a:off x="594360" y="4672584"/>
-            <a:ext cx="11002975" cy="347472"/>
+            <a:off x="640080" y="4896612"/>
+            <a:ext cx="10911535" cy="310896"/>
           </a:xfrm>
           <a:prstGeom prst="rect">
             <a:avLst/>
@@ -6260,11 +5840,11 @@
             <a:r>
               <a:rPr sz="2000" b="0" i="1">
                 <a:solidFill>
-                  <a:srgbClr val="8C8C8C"/>
-                </a:solidFill>
-                <a:latin typeface="Arial"/>
-              </a:rPr>
-              <a:t/>
+                  <a:srgbClr val="828282"/>
+                </a:solidFill>
+                <a:latin typeface="Arial"/>
+              </a:rPr>
+              <a:t>A minha alma vai cantar</a:t>
             </a:r>
           </a:p>
         </p:txBody>
@@ -6303,23 +5883,23 @@
         </p:nvSpPr>
         <p:spPr>
           <a:xfrm>
-            <a:off x="594360" y="1837944"/>
-            <a:ext cx="11002975" cy="685800"/>
-          </a:xfrm>
-          <a:prstGeom prst="rect">
-            <a:avLst/>
-          </a:prstGeom>
-          <a:noFill/>
-        </p:spPr>
-        <p:txBody>
-          <a:bodyPr wrap="square">
-            <a:spAutoFit/>
-          </a:bodyPr>
-          <a:lstStyle/>
-          <a:p>
-            <a:pPr algn="ctr"/>
-            <a:r>
-              <a:rPr sz="4400" b="1" i="0">
+            <a:off x="640080" y="1650492"/>
+            <a:ext cx="10911535" cy="731520"/>
+          </a:xfrm>
+          <a:prstGeom prst="rect">
+            <a:avLst/>
+          </a:prstGeom>
+          <a:noFill/>
+        </p:spPr>
+        <p:txBody>
+          <a:bodyPr wrap="square">
+            <a:spAutoFit/>
+          </a:bodyPr>
+          <a:lstStyle/>
+          <a:p>
+            <a:pPr algn="ctr"/>
+            <a:r>
+              <a:rPr sz="4800" b="1" i="0">
                 <a:solidFill>
                   <a:srgbClr val="FFFFFF"/>
                 </a:solidFill>
@@ -6338,8 +5918,8 @@
         </p:nvSpPr>
         <p:spPr>
           <a:xfrm>
-            <a:off x="594360" y="2560320"/>
-            <a:ext cx="11002975" cy="384048"/>
+            <a:off x="640080" y="2418588"/>
+            <a:ext cx="10911535" cy="365760"/>
           </a:xfrm>
           <a:prstGeom prst="rect">
             <a:avLst/>
@@ -6356,7 +5936,7 @@
             <a:r>
               <a:rPr sz="2400" b="0" i="1">
                 <a:solidFill>
-                  <a:srgbClr val="B4B4B4"/>
+                  <a:srgbClr val="AAAAAA"/>
                 </a:solidFill>
                 <a:latin typeface="Arial"/>
               </a:rPr>
@@ -6373,8 +5953,78 @@
         </p:nvSpPr>
         <p:spPr>
           <a:xfrm>
-            <a:off x="594360" y="2980944"/>
-            <a:ext cx="11002975" cy="347472"/>
+            <a:off x="640080" y="2985516"/>
+            <a:ext cx="10911535" cy="731520"/>
+          </a:xfrm>
+          <a:prstGeom prst="rect">
+            <a:avLst/>
+          </a:prstGeom>
+          <a:noFill/>
+        </p:spPr>
+        <p:txBody>
+          <a:bodyPr wrap="square">
+            <a:spAutoFit/>
+          </a:bodyPr>
+          <a:lstStyle/>
+          <a:p>
+            <a:pPr algn="ctr"/>
+            <a:r>
+              <a:rPr sz="4800" b="1" i="0">
+                <a:solidFill>
+                  <a:srgbClr val="FFFFFF"/>
+                </a:solidFill>
+                <a:latin typeface="Arial"/>
+              </a:rPr>
+              <a:t>振り向かない    振り向かない</a:t>
+            </a:r>
+          </a:p>
+        </p:txBody>
+      </p:sp>
+      <p:sp>
+        <p:nvSpPr>
+          <p:cNvPr id="5" name="TextBox 4"/>
+          <p:cNvSpPr txBox="1"/>
+          <p:nvPr/>
+        </p:nvSpPr>
+        <p:spPr>
+          <a:xfrm>
+            <a:off x="640080" y="3753612"/>
+            <a:ext cx="10911535" cy="365760"/>
+          </a:xfrm>
+          <a:prstGeom prst="rect">
+            <a:avLst/>
+          </a:prstGeom>
+          <a:noFill/>
+        </p:spPr>
+        <p:txBody>
+          <a:bodyPr wrap="square">
+            <a:spAutoFit/>
+          </a:bodyPr>
+          <a:lstStyle/>
+          <a:p>
+            <a:pPr algn="ctr"/>
+            <a:r>
+              <a:rPr sz="2400" b="0" i="1">
+                <a:solidFill>
+                  <a:srgbClr val="AAAAAA"/>
+                </a:solidFill>
+                <a:latin typeface="Arial"/>
+              </a:rPr>
+              <a:t>furimuka nai furimukanai</a:t>
+            </a:r>
+          </a:p>
+        </p:txBody>
+      </p:sp>
+      <p:sp>
+        <p:nvSpPr>
+          <p:cNvPr id="6" name="TextBox 5"/>
+          <p:cNvSpPr txBox="1"/>
+          <p:nvPr/>
+        </p:nvSpPr>
+        <p:spPr>
+          <a:xfrm>
+            <a:off x="640080" y="4530852"/>
+            <a:ext cx="10911535" cy="310896"/>
           </a:xfrm>
           <a:prstGeom prst="rect">
             <a:avLst/>
@@ -6391,81 +6041,11 @@
             <a:r>
               <a:rPr sz="2000" b="0" i="1">
                 <a:solidFill>
-                  <a:srgbClr val="8C8C8C"/>
-                </a:solidFill>
-                <a:latin typeface="Arial"/>
-              </a:rPr>
-              <a:t/>
-            </a:r>
-          </a:p>
-        </p:txBody>
-      </p:sp>
-      <p:sp>
-        <p:nvSpPr>
-          <p:cNvPr id="5" name="TextBox 4"/>
-          <p:cNvSpPr txBox="1"/>
-          <p:nvPr/>
-        </p:nvSpPr>
-        <p:spPr>
-          <a:xfrm>
-            <a:off x="594360" y="3529584"/>
-            <a:ext cx="11002975" cy="685800"/>
-          </a:xfrm>
-          <a:prstGeom prst="rect">
-            <a:avLst/>
-          </a:prstGeom>
-          <a:noFill/>
-        </p:spPr>
-        <p:txBody>
-          <a:bodyPr wrap="square">
-            <a:spAutoFit/>
-          </a:bodyPr>
-          <a:lstStyle/>
-          <a:p>
-            <a:pPr algn="ctr"/>
-            <a:r>
-              <a:rPr sz="4400" b="1" i="0">
-                <a:solidFill>
-                  <a:srgbClr val="FFFFFF"/>
-                </a:solidFill>
-                <a:latin typeface="Arial"/>
-              </a:rPr>
-              <a:t>振り向かない    振り向かない</a:t>
-            </a:r>
-          </a:p>
-        </p:txBody>
-      </p:sp>
-      <p:sp>
-        <p:nvSpPr>
-          <p:cNvPr id="6" name="TextBox 5"/>
-          <p:cNvSpPr txBox="1"/>
-          <p:nvPr/>
-        </p:nvSpPr>
-        <p:spPr>
-          <a:xfrm>
-            <a:off x="594360" y="4251960"/>
-            <a:ext cx="11002975" cy="384048"/>
-          </a:xfrm>
-          <a:prstGeom prst="rect">
-            <a:avLst/>
-          </a:prstGeom>
-          <a:noFill/>
-        </p:spPr>
-        <p:txBody>
-          <a:bodyPr wrap="square">
-            <a:spAutoFit/>
-          </a:bodyPr>
-          <a:lstStyle/>
-          <a:p>
-            <a:pPr algn="ctr"/>
-            <a:r>
-              <a:rPr sz="2400" b="0" i="1">
-                <a:solidFill>
-                  <a:srgbClr val="B4B4B4"/>
-                </a:solidFill>
-                <a:latin typeface="Arial"/>
-              </a:rPr>
-              <a:t>furimuka nai furimukanai</a:t>
+                  <a:srgbClr val="828282"/>
+                </a:solidFill>
+                <a:latin typeface="Arial"/>
+              </a:rPr>
+              <a:t>Jesus está aqui, a Deus seja a glória</a:t>
             </a:r>
           </a:p>
         </p:txBody>
@@ -6478,8 +6058,8 @@
         </p:nvSpPr>
         <p:spPr>
           <a:xfrm>
-            <a:off x="594360" y="4672584"/>
-            <a:ext cx="11002975" cy="347472"/>
+            <a:off x="640080" y="4896612"/>
+            <a:ext cx="10911535" cy="310896"/>
           </a:xfrm>
           <a:prstGeom prst="rect">
             <a:avLst/>
@@ -6496,11 +6076,11 @@
             <a:r>
               <a:rPr sz="2000" b="0" i="1">
                 <a:solidFill>
-                  <a:srgbClr val="8C8C8C"/>
-                </a:solidFill>
-                <a:latin typeface="Arial"/>
-              </a:rPr>
-              <a:t/>
+                  <a:srgbClr val="828282"/>
+                </a:solidFill>
+                <a:latin typeface="Arial"/>
+              </a:rPr>
+              <a:t>Eu decidi seguir a Jesus</a:t>
             </a:r>
           </a:p>
         </p:txBody>
@@ -6539,23 +6119,23 @@
         </p:nvSpPr>
         <p:spPr>
           <a:xfrm>
-            <a:off x="594360" y="1837944"/>
-            <a:ext cx="11002975" cy="685800"/>
-          </a:xfrm>
-          <a:prstGeom prst="rect">
-            <a:avLst/>
-          </a:prstGeom>
-          <a:noFill/>
-        </p:spPr>
-        <p:txBody>
-          <a:bodyPr wrap="square">
-            <a:spAutoFit/>
-          </a:bodyPr>
-          <a:lstStyle/>
-          <a:p>
-            <a:pPr algn="ctr"/>
-            <a:r>
-              <a:rPr sz="4400" b="1" i="0">
+            <a:off x="640080" y="1650492"/>
+            <a:ext cx="10911535" cy="731520"/>
+          </a:xfrm>
+          <a:prstGeom prst="rect">
+            <a:avLst/>
+          </a:prstGeom>
+          <a:noFill/>
+        </p:spPr>
+        <p:txBody>
+          <a:bodyPr wrap="square">
+            <a:spAutoFit/>
+          </a:bodyPr>
+          <a:lstStyle/>
+          <a:p>
+            <a:pPr algn="ctr"/>
+            <a:r>
+              <a:rPr sz="4800" b="1" i="0">
                 <a:solidFill>
                   <a:srgbClr val="FFFFFF"/>
                 </a:solidFill>
@@ -6574,8 +6154,8 @@
         </p:nvSpPr>
         <p:spPr>
           <a:xfrm>
-            <a:off x="594360" y="2560320"/>
-            <a:ext cx="11002975" cy="384048"/>
+            <a:off x="640080" y="2418588"/>
+            <a:ext cx="10911535" cy="365760"/>
           </a:xfrm>
           <a:prstGeom prst="rect">
             <a:avLst/>
@@ -6592,7 +6172,7 @@
             <a:r>
               <a:rPr sz="2400" b="0" i="1">
                 <a:solidFill>
-                  <a:srgbClr val="B4B4B4"/>
+                  <a:srgbClr val="AAAAAA"/>
                 </a:solidFill>
                 <a:latin typeface="Arial"/>
               </a:rPr>
@@ -6609,8 +6189,78 @@
         </p:nvSpPr>
         <p:spPr>
           <a:xfrm>
-            <a:off x="594360" y="2980944"/>
-            <a:ext cx="11002975" cy="347472"/>
+            <a:off x="640080" y="2985516"/>
+            <a:ext cx="10911535" cy="731520"/>
+          </a:xfrm>
+          <a:prstGeom prst="rect">
+            <a:avLst/>
+          </a:prstGeom>
+          <a:noFill/>
+        </p:spPr>
+        <p:txBody>
+          <a:bodyPr wrap="square">
+            <a:spAutoFit/>
+          </a:bodyPr>
+          <a:lstStyle/>
+          <a:p>
+            <a:pPr algn="ctr"/>
+            <a:r>
+              <a:rPr sz="4800" b="1" i="0">
+                <a:solidFill>
+                  <a:srgbClr val="FFFFFF"/>
+                </a:solidFill>
+                <a:latin typeface="Arial"/>
+              </a:rPr>
+              <a:t>振り向かない         振り向かない</a:t>
+            </a:r>
+          </a:p>
+        </p:txBody>
+      </p:sp>
+      <p:sp>
+        <p:nvSpPr>
+          <p:cNvPr id="5" name="TextBox 4"/>
+          <p:cNvSpPr txBox="1"/>
+          <p:nvPr/>
+        </p:nvSpPr>
+        <p:spPr>
+          <a:xfrm>
+            <a:off x="640080" y="3753612"/>
+            <a:ext cx="10911535" cy="365760"/>
+          </a:xfrm>
+          <a:prstGeom prst="rect">
+            <a:avLst/>
+          </a:prstGeom>
+          <a:noFill/>
+        </p:spPr>
+        <p:txBody>
+          <a:bodyPr wrap="square">
+            <a:spAutoFit/>
+          </a:bodyPr>
+          <a:lstStyle/>
+          <a:p>
+            <a:pPr algn="ctr"/>
+            <a:r>
+              <a:rPr sz="2400" b="0" i="1">
+                <a:solidFill>
+                  <a:srgbClr val="AAAAAA"/>
+                </a:solidFill>
+                <a:latin typeface="Arial"/>
+              </a:rPr>
+              <a:t>furimuka nai furimukanai</a:t>
+            </a:r>
+          </a:p>
+        </p:txBody>
+      </p:sp>
+      <p:sp>
+        <p:nvSpPr>
+          <p:cNvPr id="6" name="TextBox 5"/>
+          <p:cNvSpPr txBox="1"/>
+          <p:nvPr/>
+        </p:nvSpPr>
+        <p:spPr>
+          <a:xfrm>
+            <a:off x="640080" y="4530852"/>
+            <a:ext cx="10911535" cy="310896"/>
           </a:xfrm>
           <a:prstGeom prst="rect">
             <a:avLst/>
@@ -6627,81 +6277,11 @@
             <a:r>
               <a:rPr sz="2000" b="0" i="1">
                 <a:solidFill>
-                  <a:srgbClr val="8C8C8C"/>
-                </a:solidFill>
-                <a:latin typeface="Arial"/>
-              </a:rPr>
-              <a:t/>
-            </a:r>
-          </a:p>
-        </p:txBody>
-      </p:sp>
-      <p:sp>
-        <p:nvSpPr>
-          <p:cNvPr id="5" name="TextBox 4"/>
-          <p:cNvSpPr txBox="1"/>
-          <p:nvPr/>
-        </p:nvSpPr>
-        <p:spPr>
-          <a:xfrm>
-            <a:off x="594360" y="3529584"/>
-            <a:ext cx="11002975" cy="685800"/>
-          </a:xfrm>
-          <a:prstGeom prst="rect">
-            <a:avLst/>
-          </a:prstGeom>
-          <a:noFill/>
-        </p:spPr>
-        <p:txBody>
-          <a:bodyPr wrap="square">
-            <a:spAutoFit/>
-          </a:bodyPr>
-          <a:lstStyle/>
-          <a:p>
-            <a:pPr algn="ctr"/>
-            <a:r>
-              <a:rPr sz="4400" b="1" i="0">
-                <a:solidFill>
-                  <a:srgbClr val="FFFFFF"/>
-                </a:solidFill>
-                <a:latin typeface="Arial"/>
-              </a:rPr>
-              <a:t>振り向かない         振り向かない</a:t>
-            </a:r>
-          </a:p>
-        </p:txBody>
-      </p:sp>
-      <p:sp>
-        <p:nvSpPr>
-          <p:cNvPr id="6" name="TextBox 5"/>
-          <p:cNvSpPr txBox="1"/>
-          <p:nvPr/>
-        </p:nvSpPr>
-        <p:spPr>
-          <a:xfrm>
-            <a:off x="594360" y="4251960"/>
-            <a:ext cx="11002975" cy="384048"/>
-          </a:xfrm>
-          <a:prstGeom prst="rect">
-            <a:avLst/>
-          </a:prstGeom>
-          <a:noFill/>
-        </p:spPr>
-        <p:txBody>
-          <a:bodyPr wrap="square">
-            <a:spAutoFit/>
-          </a:bodyPr>
-          <a:lstStyle/>
-          <a:p>
-            <a:pPr algn="ctr"/>
-            <a:r>
-              <a:rPr sz="2400" b="0" i="1">
-                <a:solidFill>
-                  <a:srgbClr val="B4B4B4"/>
-                </a:solidFill>
-                <a:latin typeface="Arial"/>
-              </a:rPr>
-              <a:t>furimuka nai furimukanai</a:t>
+                  <a:srgbClr val="828282"/>
+                </a:solidFill>
+                <a:latin typeface="Arial"/>
+              </a:rPr>
+              <a:t>Tudo o que eu preciso está em Ti</a:t>
             </a:r>
           </a:p>
         </p:txBody>
@@ -6714,8 +6294,8 @@
         </p:nvSpPr>
         <p:spPr>
           <a:xfrm>
-            <a:off x="594360" y="4672584"/>
-            <a:ext cx="11002975" cy="347472"/>
+            <a:off x="640080" y="4896612"/>
+            <a:ext cx="10911535" cy="310896"/>
           </a:xfrm>
           <a:prstGeom prst="rect">
             <a:avLst/>
@@ -6732,11 +6312,11 @@
             <a:r>
               <a:rPr sz="2000" b="0" i="1">
                 <a:solidFill>
-                  <a:srgbClr val="8C8C8C"/>
-                </a:solidFill>
-                <a:latin typeface="Arial"/>
-              </a:rPr>
-              <a:t/>
+                  <a:srgbClr val="828282"/>
+                </a:solidFill>
+                <a:latin typeface="Arial"/>
+              </a:rPr>
+              <a:t>Tudo o que eu preciso</a:t>
             </a:r>
           </a:p>
         </p:txBody>
@@ -6775,23 +6355,23 @@
         </p:nvSpPr>
         <p:spPr>
           <a:xfrm>
-            <a:off x="594360" y="1837944"/>
-            <a:ext cx="11002975" cy="685800"/>
-          </a:xfrm>
-          <a:prstGeom prst="rect">
-            <a:avLst/>
-          </a:prstGeom>
-          <a:noFill/>
-        </p:spPr>
-        <p:txBody>
-          <a:bodyPr wrap="square">
-            <a:spAutoFit/>
-          </a:bodyPr>
-          <a:lstStyle/>
-          <a:p>
-            <a:pPr algn="ctr"/>
-            <a:r>
-              <a:rPr sz="4400" b="1" i="0">
+            <a:off x="640080" y="1650492"/>
+            <a:ext cx="10911535" cy="731520"/>
+          </a:xfrm>
+          <a:prstGeom prst="rect">
+            <a:avLst/>
+          </a:prstGeom>
+          <a:noFill/>
+        </p:spPr>
+        <p:txBody>
+          <a:bodyPr wrap="square">
+            <a:spAutoFit/>
+          </a:bodyPr>
+          <a:lstStyle/>
+          <a:p>
+            <a:pPr algn="ctr"/>
+            <a:r>
+              <a:rPr sz="4800" b="1" i="0">
                 <a:solidFill>
                   <a:srgbClr val="FFFFFF"/>
                 </a:solidFill>
@@ -6810,8 +6390,8 @@
         </p:nvSpPr>
         <p:spPr>
           <a:xfrm>
-            <a:off x="594360" y="2560320"/>
-            <a:ext cx="11002975" cy="384048"/>
+            <a:off x="640080" y="2418588"/>
+            <a:ext cx="10911535" cy="365760"/>
           </a:xfrm>
           <a:prstGeom prst="rect">
             <a:avLst/>
@@ -6828,7 +6408,7 @@
             <a:r>
               <a:rPr sz="2400" b="0" i="1">
                 <a:solidFill>
-                  <a:srgbClr val="B4B4B4"/>
+                  <a:srgbClr val="AAAAAA"/>
                 </a:solidFill>
                 <a:latin typeface="Arial"/>
               </a:rPr>
@@ -6845,8 +6425,78 @@
         </p:nvSpPr>
         <p:spPr>
           <a:xfrm>
-            <a:off x="594360" y="2980944"/>
-            <a:ext cx="11002975" cy="347472"/>
+            <a:off x="640080" y="2985516"/>
+            <a:ext cx="10911535" cy="731520"/>
+          </a:xfrm>
+          <a:prstGeom prst="rect">
+            <a:avLst/>
+          </a:prstGeom>
+          <a:noFill/>
+        </p:spPr>
+        <p:txBody>
+          <a:bodyPr wrap="square">
+            <a:spAutoFit/>
+          </a:bodyPr>
+          <a:lstStyle/>
+          <a:p>
+            <a:pPr algn="ctr"/>
+            <a:r>
+              <a:rPr sz="4800" b="1" i="0">
+                <a:solidFill>
+                  <a:srgbClr val="FFFFFF"/>
+                </a:solidFill>
+                <a:latin typeface="Arial"/>
+              </a:rPr>
+              <a:t>振り向かない    振り向かない</a:t>
+            </a:r>
+          </a:p>
+        </p:txBody>
+      </p:sp>
+      <p:sp>
+        <p:nvSpPr>
+          <p:cNvPr id="5" name="TextBox 4"/>
+          <p:cNvSpPr txBox="1"/>
+          <p:nvPr/>
+        </p:nvSpPr>
+        <p:spPr>
+          <a:xfrm>
+            <a:off x="640080" y="3753612"/>
+            <a:ext cx="10911535" cy="365760"/>
+          </a:xfrm>
+          <a:prstGeom prst="rect">
+            <a:avLst/>
+          </a:prstGeom>
+          <a:noFill/>
+        </p:spPr>
+        <p:txBody>
+          <a:bodyPr wrap="square">
+            <a:spAutoFit/>
+          </a:bodyPr>
+          <a:lstStyle/>
+          <a:p>
+            <a:pPr algn="ctr"/>
+            <a:r>
+              <a:rPr sz="2400" b="0" i="1">
+                <a:solidFill>
+                  <a:srgbClr val="AAAAAA"/>
+                </a:solidFill>
+                <a:latin typeface="Arial"/>
+              </a:rPr>
+              <a:t>furimuka nai furimukanai</a:t>
+            </a:r>
+          </a:p>
+        </p:txBody>
+      </p:sp>
+      <p:sp>
+        <p:nvSpPr>
+          <p:cNvPr id="6" name="TextBox 5"/>
+          <p:cNvSpPr txBox="1"/>
+          <p:nvPr/>
+        </p:nvSpPr>
+        <p:spPr>
+          <a:xfrm>
+            <a:off x="640080" y="4530852"/>
+            <a:ext cx="10911535" cy="310896"/>
           </a:xfrm>
           <a:prstGeom prst="rect">
             <a:avLst/>
@@ -6863,81 +6513,11 @@
             <a:r>
               <a:rPr sz="2000" b="0" i="1">
                 <a:solidFill>
-                  <a:srgbClr val="8C8C8C"/>
-                </a:solidFill>
-                <a:latin typeface="Arial"/>
-              </a:rPr>
-              <a:t/>
-            </a:r>
-          </a:p>
-        </p:txBody>
-      </p:sp>
-      <p:sp>
-        <p:nvSpPr>
-          <p:cNvPr id="5" name="TextBox 4"/>
-          <p:cNvSpPr txBox="1"/>
-          <p:nvPr/>
-        </p:nvSpPr>
-        <p:spPr>
-          <a:xfrm>
-            <a:off x="594360" y="3529584"/>
-            <a:ext cx="11002975" cy="685800"/>
-          </a:xfrm>
-          <a:prstGeom prst="rect">
-            <a:avLst/>
-          </a:prstGeom>
-          <a:noFill/>
-        </p:spPr>
-        <p:txBody>
-          <a:bodyPr wrap="square">
-            <a:spAutoFit/>
-          </a:bodyPr>
-          <a:lstStyle/>
-          <a:p>
-            <a:pPr algn="ctr"/>
-            <a:r>
-              <a:rPr sz="4400" b="1" i="0">
-                <a:solidFill>
-                  <a:srgbClr val="FFFFFF"/>
-                </a:solidFill>
-                <a:latin typeface="Arial"/>
-              </a:rPr>
-              <a:t>振り向かない    振り向かない</a:t>
-            </a:r>
-          </a:p>
-        </p:txBody>
-      </p:sp>
-      <p:sp>
-        <p:nvSpPr>
-          <p:cNvPr id="6" name="TextBox 5"/>
-          <p:cNvSpPr txBox="1"/>
-          <p:nvPr/>
-        </p:nvSpPr>
-        <p:spPr>
-          <a:xfrm>
-            <a:off x="594360" y="4251960"/>
-            <a:ext cx="11002975" cy="384048"/>
-          </a:xfrm>
-          <a:prstGeom prst="rect">
-            <a:avLst/>
-          </a:prstGeom>
-          <a:noFill/>
-        </p:spPr>
-        <p:txBody>
-          <a:bodyPr wrap="square">
-            <a:spAutoFit/>
-          </a:bodyPr>
-          <a:lstStyle/>
-          <a:p>
-            <a:pPr algn="ctr"/>
-            <a:r>
-              <a:rPr sz="2400" b="0" i="1">
-                <a:solidFill>
-                  <a:srgbClr val="B4B4B4"/>
-                </a:solidFill>
-                <a:latin typeface="Arial"/>
-              </a:rPr>
-              <a:t>furimuka nai furimukanai</a:t>
+                  <a:srgbClr val="828282"/>
+                </a:solidFill>
+                <a:latin typeface="Arial"/>
+              </a:rPr>
+              <a:t>Cristo, meu tudo em tudo</a:t>
             </a:r>
           </a:p>
         </p:txBody>
@@ -6950,8 +6530,8 @@
         </p:nvSpPr>
         <p:spPr>
           <a:xfrm>
-            <a:off x="594360" y="4672584"/>
-            <a:ext cx="11002975" cy="347472"/>
+            <a:off x="640080" y="4896612"/>
+            <a:ext cx="10911535" cy="310896"/>
           </a:xfrm>
           <a:prstGeom prst="rect">
             <a:avLst/>
@@ -6968,11 +6548,11 @@
             <a:r>
               <a:rPr sz="2000" b="0" i="1">
                 <a:solidFill>
-                  <a:srgbClr val="8C8C8C"/>
-                </a:solidFill>
-                <a:latin typeface="Arial"/>
-              </a:rPr>
-              <a:t/>
+                  <a:srgbClr val="828282"/>
+                </a:solidFill>
+                <a:latin typeface="Arial"/>
+              </a:rPr>
+              <a:t>A alegria da minha salvação</a:t>
             </a:r>
           </a:p>
         </p:txBody>
@@ -7011,23 +6591,23 @@
         </p:nvSpPr>
         <p:spPr>
           <a:xfrm>
-            <a:off x="594360" y="2683764"/>
-            <a:ext cx="11002975" cy="685800"/>
-          </a:xfrm>
-          <a:prstGeom prst="rect">
-            <a:avLst/>
-          </a:prstGeom>
-          <a:noFill/>
-        </p:spPr>
-        <p:txBody>
-          <a:bodyPr wrap="square">
-            <a:spAutoFit/>
-          </a:bodyPr>
-          <a:lstStyle/>
-          <a:p>
-            <a:pPr algn="ctr"/>
-            <a:r>
-              <a:rPr sz="4400" b="1" i="0">
+            <a:off x="640080" y="2500884"/>
+            <a:ext cx="10911535" cy="731520"/>
+          </a:xfrm>
+          <a:prstGeom prst="rect">
+            <a:avLst/>
+          </a:prstGeom>
+          <a:noFill/>
+        </p:spPr>
+        <p:txBody>
+          <a:bodyPr wrap="square">
+            <a:spAutoFit/>
+          </a:bodyPr>
+          <a:lstStyle/>
+          <a:p>
+            <a:pPr algn="ctr"/>
+            <a:r>
+              <a:rPr sz="4800" b="1" i="0">
                 <a:solidFill>
                   <a:srgbClr val="FFFFFF"/>
                 </a:solidFill>
@@ -7046,8 +6626,8 @@
         </p:nvSpPr>
         <p:spPr>
           <a:xfrm>
-            <a:off x="594360" y="3406140"/>
-            <a:ext cx="11002975" cy="384048"/>
+            <a:off x="640080" y="3268980"/>
+            <a:ext cx="10911535" cy="365760"/>
           </a:xfrm>
           <a:prstGeom prst="rect">
             <a:avLst/>
@@ -7064,7 +6644,7 @@
             <a:r>
               <a:rPr sz="2400" b="0" i="1">
                 <a:solidFill>
-                  <a:srgbClr val="B4B4B4"/>
+                  <a:srgbClr val="AAAAAA"/>
                 </a:solidFill>
                 <a:latin typeface="Arial"/>
               </a:rPr>
@@ -7081,8 +6661,8 @@
         </p:nvSpPr>
         <p:spPr>
           <a:xfrm>
-            <a:off x="594360" y="3826764"/>
-            <a:ext cx="11002975" cy="347472"/>
+            <a:off x="640080" y="4046220"/>
+            <a:ext cx="10911535" cy="310896"/>
           </a:xfrm>
           <a:prstGeom prst="rect">
             <a:avLst/>
@@ -7099,11 +6679,11 @@
             <a:r>
               <a:rPr sz="2000" b="0" i="1">
                 <a:solidFill>
-                  <a:srgbClr val="8C8C8C"/>
-                </a:solidFill>
-                <a:latin typeface="Arial"/>
-              </a:rPr>
-              <a:t/>
+                  <a:srgbClr val="828282"/>
+                </a:solidFill>
+                <a:latin typeface="Arial"/>
+              </a:rPr>
+              <a:t>E esta esperança nunca falhará</a:t>
             </a:r>
           </a:p>
         </p:txBody>
@@ -7142,23 +6722,23 @@
         </p:nvSpPr>
         <p:spPr>
           <a:xfrm>
-            <a:off x="594360" y="2258568"/>
-            <a:ext cx="11002975" cy="685800"/>
-          </a:xfrm>
-          <a:prstGeom prst="rect">
-            <a:avLst/>
-          </a:prstGeom>
-          <a:noFill/>
-        </p:spPr>
-        <p:txBody>
-          <a:bodyPr wrap="square">
-            <a:spAutoFit/>
-          </a:bodyPr>
-          <a:lstStyle/>
-          <a:p>
-            <a:pPr algn="ctr"/>
-            <a:r>
-              <a:rPr sz="4400" b="1" i="0">
+            <a:off x="640080" y="2052828"/>
+            <a:ext cx="10911535" cy="731520"/>
+          </a:xfrm>
+          <a:prstGeom prst="rect">
+            <a:avLst/>
+          </a:prstGeom>
+          <a:noFill/>
+        </p:spPr>
+        <p:txBody>
+          <a:bodyPr wrap="square">
+            <a:spAutoFit/>
+          </a:bodyPr>
+          <a:lstStyle/>
+          <a:p>
+            <a:pPr algn="ctr"/>
+            <a:r>
+              <a:rPr sz="4800" b="1" i="0">
                 <a:solidFill>
                   <a:srgbClr val="FFFFFF"/>
                 </a:solidFill>
@@ -7177,99 +6757,29 @@
         </p:nvSpPr>
         <p:spPr>
           <a:xfrm>
-            <a:off x="594360" y="2980944"/>
-            <a:ext cx="11002975" cy="347472"/>
-          </a:xfrm>
-          <a:prstGeom prst="rect">
-            <a:avLst/>
-          </a:prstGeom>
-          <a:noFill/>
-        </p:spPr>
-        <p:txBody>
-          <a:bodyPr wrap="square">
-            <a:spAutoFit/>
-          </a:bodyPr>
-          <a:lstStyle/>
-          <a:p>
-            <a:pPr algn="ctr"/>
-            <a:r>
-              <a:rPr sz="2200" b="0" i="1">
-                <a:solidFill>
-                  <a:srgbClr val="8C8C8C"/>
-                </a:solidFill>
-                <a:latin typeface="Arial"/>
-              </a:rPr>
-              <a:t/>
-            </a:r>
-          </a:p>
-        </p:txBody>
-      </p:sp>
-      <p:sp>
-        <p:nvSpPr>
-          <p:cNvPr id="4" name="TextBox 3"/>
-          <p:cNvSpPr txBox="1"/>
-          <p:nvPr/>
-        </p:nvSpPr>
-        <p:spPr>
-          <a:xfrm>
-            <a:off x="594360" y="3529584"/>
-            <a:ext cx="11002975" cy="685800"/>
-          </a:xfrm>
-          <a:prstGeom prst="rect">
-            <a:avLst/>
-          </a:prstGeom>
-          <a:noFill/>
-        </p:spPr>
-        <p:txBody>
-          <a:bodyPr wrap="square">
-            <a:spAutoFit/>
-          </a:bodyPr>
-          <a:lstStyle/>
-          <a:p>
-            <a:pPr algn="ctr"/>
-            <a:r>
-              <a:rPr sz="4400" b="1" i="0">
+            <a:off x="640080" y="2985516"/>
+            <a:ext cx="10911535" cy="731520"/>
+          </a:xfrm>
+          <a:prstGeom prst="rect">
+            <a:avLst/>
+          </a:prstGeom>
+          <a:noFill/>
+        </p:spPr>
+        <p:txBody>
+          <a:bodyPr wrap="square">
+            <a:spAutoFit/>
+          </a:bodyPr>
+          <a:lstStyle/>
+          <a:p>
+            <a:pPr algn="ctr"/>
+            <a:r>
+              <a:rPr sz="4800" b="1" i="0">
                 <a:solidFill>
                   <a:srgbClr val="FFFFFF"/>
                 </a:solidFill>
                 <a:latin typeface="Arial"/>
               </a:rPr>
               <a:t>Através de cada julgamento</a:t>
-            </a:r>
-          </a:p>
-        </p:txBody>
-      </p:sp>
-      <p:sp>
-        <p:nvSpPr>
-          <p:cNvPr id="5" name="TextBox 4"/>
-          <p:cNvSpPr txBox="1"/>
-          <p:nvPr/>
-        </p:nvSpPr>
-        <p:spPr>
-          <a:xfrm>
-            <a:off x="594360" y="4251960"/>
-            <a:ext cx="11002975" cy="347472"/>
-          </a:xfrm>
-          <a:prstGeom prst="rect">
-            <a:avLst/>
-          </a:prstGeom>
-          <a:noFill/>
-        </p:spPr>
-        <p:txBody>
-          <a:bodyPr wrap="square">
-            <a:spAutoFit/>
-          </a:bodyPr>
-          <a:lstStyle/>
-          <a:p>
-            <a:pPr algn="ctr"/>
-            <a:r>
-              <a:rPr sz="2200" b="0" i="1">
-                <a:solidFill>
-                  <a:srgbClr val="8C8C8C"/>
-                </a:solidFill>
-                <a:latin typeface="Arial"/>
-              </a:rPr>
-              <a:t/>
             </a:r>
           </a:p>
         </p:txBody>
@@ -7308,23 +6818,23 @@
         </p:nvSpPr>
         <p:spPr>
           <a:xfrm>
-            <a:off x="594360" y="2258568"/>
-            <a:ext cx="11002975" cy="685800"/>
-          </a:xfrm>
-          <a:prstGeom prst="rect">
-            <a:avLst/>
-          </a:prstGeom>
-          <a:noFill/>
-        </p:spPr>
-        <p:txBody>
-          <a:bodyPr wrap="square">
-            <a:spAutoFit/>
-          </a:bodyPr>
-          <a:lstStyle/>
-          <a:p>
-            <a:pPr algn="ctr"/>
-            <a:r>
-              <a:rPr sz="4400" b="1" i="0">
+            <a:off x="640080" y="2052828"/>
+            <a:ext cx="10911535" cy="731520"/>
+          </a:xfrm>
+          <a:prstGeom prst="rect">
+            <a:avLst/>
+          </a:prstGeom>
+          <a:noFill/>
+        </p:spPr>
+        <p:txBody>
+          <a:bodyPr wrap="square">
+            <a:spAutoFit/>
+          </a:bodyPr>
+          <a:lstStyle/>
+          <a:p>
+            <a:pPr algn="ctr"/>
+            <a:r>
+              <a:rPr sz="4800" b="1" i="0">
                 <a:solidFill>
                   <a:srgbClr val="FFFFFF"/>
                 </a:solidFill>
@@ -7343,29 +6853,29 @@
         </p:nvSpPr>
         <p:spPr>
           <a:xfrm>
-            <a:off x="594360" y="2980944"/>
-            <a:ext cx="11002975" cy="347472"/>
-          </a:xfrm>
-          <a:prstGeom prst="rect">
-            <a:avLst/>
-          </a:prstGeom>
-          <a:noFill/>
-        </p:spPr>
-        <p:txBody>
-          <a:bodyPr wrap="square">
-            <a:spAutoFit/>
-          </a:bodyPr>
-          <a:lstStyle/>
-          <a:p>
-            <a:pPr algn="ctr"/>
-            <a:r>
-              <a:rPr sz="2200" b="0" i="1">
-                <a:solidFill>
-                  <a:srgbClr val="8C8C8C"/>
-                </a:solidFill>
-                <a:latin typeface="Arial"/>
-              </a:rPr>
-              <a:t/>
+            <a:off x="640080" y="2985516"/>
+            <a:ext cx="10911535" cy="731520"/>
+          </a:xfrm>
+          <a:prstGeom prst="rect">
+            <a:avLst/>
+          </a:prstGeom>
+          <a:noFill/>
+        </p:spPr>
+        <p:txBody>
+          <a:bodyPr wrap="square">
+            <a:spAutoFit/>
+          </a:bodyPr>
+          <a:lstStyle/>
+          <a:p>
+            <a:pPr algn="ctr"/>
+            <a:r>
+              <a:rPr sz="3800" b="1" i="0">
+                <a:solidFill>
+                  <a:srgbClr val="FFFFFF"/>
+                </a:solidFill>
+                <a:latin typeface="Arial"/>
+              </a:rPr>
+              <a:t>Não tem volta, eu fui posto em liberdade</a:t>
             </a:r>
           </a:p>
         </p:txBody>
@@ -7378,29 +6888,29 @@
         </p:nvSpPr>
         <p:spPr>
           <a:xfrm>
-            <a:off x="594360" y="3529584"/>
-            <a:ext cx="11002975" cy="685800"/>
-          </a:xfrm>
-          <a:prstGeom prst="rect">
-            <a:avLst/>
-          </a:prstGeom>
-          <a:noFill/>
-        </p:spPr>
-        <p:txBody>
-          <a:bodyPr wrap="square">
-            <a:spAutoFit/>
-          </a:bodyPr>
-          <a:lstStyle/>
-          <a:p>
-            <a:pPr algn="ctr"/>
-            <a:r>
-              <a:rPr sz="3520" b="1" i="0">
-                <a:solidFill>
-                  <a:srgbClr val="FFFFFF"/>
-                </a:solidFill>
-                <a:latin typeface="Arial"/>
-              </a:rPr>
-              <a:t>Não tem volta, eu fui posto em liberdade</a:t>
+            <a:off x="640080" y="4128516"/>
+            <a:ext cx="10911535" cy="310896"/>
+          </a:xfrm>
+          <a:prstGeom prst="rect">
+            <a:avLst/>
+          </a:prstGeom>
+          <a:noFill/>
+        </p:spPr>
+        <p:txBody>
+          <a:bodyPr wrap="square">
+            <a:spAutoFit/>
+          </a:bodyPr>
+          <a:lstStyle/>
+          <a:p>
+            <a:pPr algn="ctr"/>
+            <a:r>
+              <a:rPr sz="2000" b="0" i="0">
+                <a:solidFill>
+                  <a:srgbClr val="828282"/>
+                </a:solidFill>
+                <a:latin typeface="Arial"/>
+              </a:rPr>
+              <a:t>キリストにだけ       必要なものが</a:t>
             </a:r>
           </a:p>
         </p:txBody>
@@ -7413,29 +6923,29 @@
         </p:nvSpPr>
         <p:spPr>
           <a:xfrm>
-            <a:off x="594360" y="4251960"/>
-            <a:ext cx="11002975" cy="347472"/>
-          </a:xfrm>
-          <a:prstGeom prst="rect">
-            <a:avLst/>
-          </a:prstGeom>
-          <a:noFill/>
-        </p:spPr>
-        <p:txBody>
-          <a:bodyPr wrap="square">
-            <a:spAutoFit/>
-          </a:bodyPr>
-          <a:lstStyle/>
-          <a:p>
-            <a:pPr algn="ctr"/>
-            <a:r>
-              <a:rPr sz="2200" b="0" i="1">
-                <a:solidFill>
-                  <a:srgbClr val="8C8C8C"/>
-                </a:solidFill>
-                <a:latin typeface="Arial"/>
-              </a:rPr>
-              <a:t/>
+            <a:off x="640080" y="4494276"/>
+            <a:ext cx="10911535" cy="310896"/>
+          </a:xfrm>
+          <a:prstGeom prst="rect">
+            <a:avLst/>
+          </a:prstGeom>
+          <a:noFill/>
+        </p:spPr>
+        <p:txBody>
+          <a:bodyPr wrap="square">
+            <a:spAutoFit/>
+          </a:bodyPr>
+          <a:lstStyle/>
+          <a:p>
+            <a:pPr algn="ctr"/>
+            <a:r>
+              <a:rPr sz="2000" b="0" i="0">
+                <a:solidFill>
+                  <a:srgbClr val="828282"/>
+                </a:solidFill>
+                <a:latin typeface="Arial"/>
+              </a:rPr>
+              <a:t>すべてある 十分に 　すべてある</a:t>
             </a:r>
           </a:p>
         </p:txBody>
@@ -7474,23 +6984,23 @@
         </p:nvSpPr>
         <p:spPr>
           <a:xfrm>
-            <a:off x="594360" y="2258568"/>
-            <a:ext cx="11002975" cy="685800"/>
-          </a:xfrm>
-          <a:prstGeom prst="rect">
-            <a:avLst/>
-          </a:prstGeom>
-          <a:noFill/>
-        </p:spPr>
-        <p:txBody>
-          <a:bodyPr wrap="square">
-            <a:spAutoFit/>
-          </a:bodyPr>
-          <a:lstStyle/>
-          <a:p>
-            <a:pPr algn="ctr"/>
-            <a:r>
-              <a:rPr sz="4400" b="1" i="0">
+            <a:off x="640080" y="2052828"/>
+            <a:ext cx="10911535" cy="731520"/>
+          </a:xfrm>
+          <a:prstGeom prst="rect">
+            <a:avLst/>
+          </a:prstGeom>
+          <a:noFill/>
+        </p:spPr>
+        <p:txBody>
+          <a:bodyPr wrap="square">
+            <a:spAutoFit/>
+          </a:bodyPr>
+          <a:lstStyle/>
+          <a:p>
+            <a:pPr algn="ctr"/>
+            <a:r>
+              <a:rPr sz="4800" b="1" i="0">
                 <a:solidFill>
                   <a:srgbClr val="FFFFFF"/>
                 </a:solidFill>
@@ -7509,29 +7019,29 @@
         </p:nvSpPr>
         <p:spPr>
           <a:xfrm>
-            <a:off x="594360" y="2980944"/>
-            <a:ext cx="11002975" cy="347472"/>
-          </a:xfrm>
-          <a:prstGeom prst="rect">
-            <a:avLst/>
-          </a:prstGeom>
-          <a:noFill/>
-        </p:spPr>
-        <p:txBody>
-          <a:bodyPr wrap="square">
-            <a:spAutoFit/>
-          </a:bodyPr>
-          <a:lstStyle/>
-          <a:p>
-            <a:pPr algn="ctr"/>
-            <a:r>
-              <a:rPr sz="2200" b="0" i="1">
-                <a:solidFill>
-                  <a:srgbClr val="8C8C8C"/>
-                </a:solidFill>
-                <a:latin typeface="Arial"/>
-              </a:rPr>
-              <a:t/>
+            <a:off x="640080" y="2985516"/>
+            <a:ext cx="10911535" cy="731520"/>
+          </a:xfrm>
+          <a:prstGeom prst="rect">
+            <a:avLst/>
+          </a:prstGeom>
+          <a:noFill/>
+        </p:spPr>
+        <p:txBody>
+          <a:bodyPr wrap="square">
+            <a:spAutoFit/>
+          </a:bodyPr>
+          <a:lstStyle/>
+          <a:p>
+            <a:pPr algn="ctr"/>
+            <a:r>
+              <a:rPr sz="4800" b="1" i="0">
+                <a:solidFill>
+                  <a:srgbClr val="FFFFFF"/>
+                </a:solidFill>
+                <a:latin typeface="Arial"/>
+              </a:rPr>
+              <a:t>Cristo é suficiente para mim</a:t>
             </a:r>
           </a:p>
         </p:txBody>
@@ -7544,29 +7054,29 @@
         </p:nvSpPr>
         <p:spPr>
           <a:xfrm>
-            <a:off x="594360" y="3529584"/>
-            <a:ext cx="11002975" cy="685800"/>
-          </a:xfrm>
-          <a:prstGeom prst="rect">
-            <a:avLst/>
-          </a:prstGeom>
-          <a:noFill/>
-        </p:spPr>
-        <p:txBody>
-          <a:bodyPr wrap="square">
-            <a:spAutoFit/>
-          </a:bodyPr>
-          <a:lstStyle/>
-          <a:p>
-            <a:pPr algn="ctr"/>
-            <a:r>
-              <a:rPr sz="4400" b="1" i="0">
-                <a:solidFill>
-                  <a:srgbClr val="FFFFFF"/>
-                </a:solidFill>
-                <a:latin typeface="Arial"/>
-              </a:rPr>
-              <a:t>Cristo é suficiente para mim</a:t>
+            <a:off x="640080" y="4128516"/>
+            <a:ext cx="10911535" cy="310896"/>
+          </a:xfrm>
+          <a:prstGeom prst="rect">
+            <a:avLst/>
+          </a:prstGeom>
+          <a:noFill/>
+        </p:spPr>
+        <p:txBody>
+          <a:bodyPr wrap="square">
+            <a:spAutoFit/>
+          </a:bodyPr>
+          <a:lstStyle/>
+          <a:p>
+            <a:pPr algn="ctr"/>
+            <a:r>
+              <a:rPr sz="2000" b="0" i="0">
+                <a:solidFill>
+                  <a:srgbClr val="828282"/>
+                </a:solidFill>
+                <a:latin typeface="Arial"/>
+              </a:rPr>
+              <a:t>キリストにだけ       必要なものが</a:t>
             </a:r>
           </a:p>
         </p:txBody>
@@ -7579,29 +7089,29 @@
         </p:nvSpPr>
         <p:spPr>
           <a:xfrm>
-            <a:off x="594360" y="4251960"/>
-            <a:ext cx="11002975" cy="347472"/>
-          </a:xfrm>
-          <a:prstGeom prst="rect">
-            <a:avLst/>
-          </a:prstGeom>
-          <a:noFill/>
-        </p:spPr>
-        <p:txBody>
-          <a:bodyPr wrap="square">
-            <a:spAutoFit/>
-          </a:bodyPr>
-          <a:lstStyle/>
-          <a:p>
-            <a:pPr algn="ctr"/>
-            <a:r>
-              <a:rPr sz="2200" b="0" i="1">
-                <a:solidFill>
-                  <a:srgbClr val="8C8C8C"/>
-                </a:solidFill>
-                <a:latin typeface="Arial"/>
-              </a:rPr>
-              <a:t/>
+            <a:off x="640080" y="4494276"/>
+            <a:ext cx="10911535" cy="310896"/>
+          </a:xfrm>
+          <a:prstGeom prst="rect">
+            <a:avLst/>
+          </a:prstGeom>
+          <a:noFill/>
+        </p:spPr>
+        <p:txBody>
+          <a:bodyPr wrap="square">
+            <a:spAutoFit/>
+          </a:bodyPr>
+          <a:lstStyle/>
+          <a:p>
+            <a:pPr algn="ctr"/>
+            <a:r>
+              <a:rPr sz="2000" b="0" i="0">
+                <a:solidFill>
+                  <a:srgbClr val="828282"/>
+                </a:solidFill>
+                <a:latin typeface="Arial"/>
+              </a:rPr>
+              <a:t>すべてある 十分に 　すべてある</a:t>
             </a:r>
           </a:p>
         </p:txBody>
@@ -7640,23 +7150,23 @@
         </p:nvSpPr>
         <p:spPr>
           <a:xfrm>
-            <a:off x="594360" y="2258568"/>
-            <a:ext cx="11002975" cy="685800"/>
-          </a:xfrm>
-          <a:prstGeom prst="rect">
-            <a:avLst/>
-          </a:prstGeom>
-          <a:noFill/>
-        </p:spPr>
-        <p:txBody>
-          <a:bodyPr wrap="square">
-            <a:spAutoFit/>
-          </a:bodyPr>
-          <a:lstStyle/>
-          <a:p>
-            <a:pPr algn="ctr"/>
-            <a:r>
-              <a:rPr sz="4400" b="1" i="0">
+            <a:off x="640080" y="2052828"/>
+            <a:ext cx="10911535" cy="731520"/>
+          </a:xfrm>
+          <a:prstGeom prst="rect">
+            <a:avLst/>
+          </a:prstGeom>
+          <a:noFill/>
+        </p:spPr>
+        <p:txBody>
+          <a:bodyPr wrap="square">
+            <a:spAutoFit/>
+          </a:bodyPr>
+          <a:lstStyle/>
+          <a:p>
+            <a:pPr algn="ctr"/>
+            <a:r>
+              <a:rPr sz="4800" b="1" i="0">
                 <a:solidFill>
                   <a:srgbClr val="FFFFFF"/>
                 </a:solidFill>
@@ -7675,99 +7185,29 @@
         </p:nvSpPr>
         <p:spPr>
           <a:xfrm>
-            <a:off x="594360" y="2980944"/>
-            <a:ext cx="11002975" cy="347472"/>
-          </a:xfrm>
-          <a:prstGeom prst="rect">
-            <a:avLst/>
-          </a:prstGeom>
-          <a:noFill/>
-        </p:spPr>
-        <p:txBody>
-          <a:bodyPr wrap="square">
-            <a:spAutoFit/>
-          </a:bodyPr>
-          <a:lstStyle/>
-          <a:p>
-            <a:pPr algn="ctr"/>
-            <a:r>
-              <a:rPr sz="2200" b="0" i="1">
-                <a:solidFill>
-                  <a:srgbClr val="8C8C8C"/>
-                </a:solidFill>
-                <a:latin typeface="Arial"/>
-              </a:rPr>
-              <a:t/>
-            </a:r>
-          </a:p>
-        </p:txBody>
-      </p:sp>
-      <p:sp>
-        <p:nvSpPr>
-          <p:cNvPr id="4" name="TextBox 3"/>
-          <p:cNvSpPr txBox="1"/>
-          <p:nvPr/>
-        </p:nvSpPr>
-        <p:spPr>
-          <a:xfrm>
-            <a:off x="594360" y="3529584"/>
-            <a:ext cx="11002975" cy="685800"/>
-          </a:xfrm>
-          <a:prstGeom prst="rect">
-            <a:avLst/>
-          </a:prstGeom>
-          <a:noFill/>
-        </p:spPr>
-        <p:txBody>
-          <a:bodyPr wrap="square">
-            <a:spAutoFit/>
-          </a:bodyPr>
-          <a:lstStyle/>
-          <a:p>
-            <a:pPr algn="ctr"/>
-            <a:r>
-              <a:rPr sz="3911" b="1" i="0">
+            <a:off x="640080" y="2985516"/>
+            <a:ext cx="10911535" cy="731520"/>
+          </a:xfrm>
+          <a:prstGeom prst="rect">
+            <a:avLst/>
+          </a:prstGeom>
+          <a:noFill/>
+        </p:spPr>
+        <p:txBody>
+          <a:bodyPr wrap="square">
+            <a:spAutoFit/>
+          </a:bodyPr>
+          <a:lstStyle/>
+          <a:p>
+            <a:pPr algn="ctr"/>
+            <a:r>
+              <a:rPr sz="4200" b="1" i="0">
                 <a:solidFill>
                   <a:srgbClr val="FFFFFF"/>
                 </a:solidFill>
                 <a:latin typeface="Arial"/>
               </a:rPr>
               <a:t>Não tem volta, não pode voltar atrás</a:t>
-            </a:r>
-          </a:p>
-        </p:txBody>
-      </p:sp>
-      <p:sp>
-        <p:nvSpPr>
-          <p:cNvPr id="5" name="TextBox 4"/>
-          <p:cNvSpPr txBox="1"/>
-          <p:nvPr/>
-        </p:nvSpPr>
-        <p:spPr>
-          <a:xfrm>
-            <a:off x="594360" y="4251960"/>
-            <a:ext cx="11002975" cy="347472"/>
-          </a:xfrm>
-          <a:prstGeom prst="rect">
-            <a:avLst/>
-          </a:prstGeom>
-          <a:noFill/>
-        </p:spPr>
-        <p:txBody>
-          <a:bodyPr wrap="square">
-            <a:spAutoFit/>
-          </a:bodyPr>
-          <a:lstStyle/>
-          <a:p>
-            <a:pPr algn="ctr"/>
-            <a:r>
-              <a:rPr sz="2200" b="0" i="1">
-                <a:solidFill>
-                  <a:srgbClr val="8C8C8C"/>
-                </a:solidFill>
-                <a:latin typeface="Arial"/>
-              </a:rPr>
-              <a:t/>
             </a:r>
           </a:p>
         </p:txBody>
@@ -7806,23 +7246,23 @@
         </p:nvSpPr>
         <p:spPr>
           <a:xfrm>
-            <a:off x="594360" y="2258568"/>
-            <a:ext cx="11002975" cy="685800"/>
-          </a:xfrm>
-          <a:prstGeom prst="rect">
-            <a:avLst/>
-          </a:prstGeom>
-          <a:noFill/>
-        </p:spPr>
-        <p:txBody>
-          <a:bodyPr wrap="square">
-            <a:spAutoFit/>
-          </a:bodyPr>
-          <a:lstStyle/>
-          <a:p>
-            <a:pPr algn="ctr"/>
-            <a:r>
-              <a:rPr sz="4400" b="1" i="0">
+            <a:off x="640080" y="2052828"/>
+            <a:ext cx="10911535" cy="731520"/>
+          </a:xfrm>
+          <a:prstGeom prst="rect">
+            <a:avLst/>
+          </a:prstGeom>
+          <a:noFill/>
+        </p:spPr>
+        <p:txBody>
+          <a:bodyPr wrap="square">
+            <a:spAutoFit/>
+          </a:bodyPr>
+          <a:lstStyle/>
+          <a:p>
+            <a:pPr algn="ctr"/>
+            <a:r>
+              <a:rPr sz="4800" b="1" i="0">
                 <a:solidFill>
                   <a:srgbClr val="FFFFFF"/>
                 </a:solidFill>
@@ -7841,99 +7281,29 @@
         </p:nvSpPr>
         <p:spPr>
           <a:xfrm>
-            <a:off x="594360" y="2980944"/>
-            <a:ext cx="11002975" cy="347472"/>
-          </a:xfrm>
-          <a:prstGeom prst="rect">
-            <a:avLst/>
-          </a:prstGeom>
-          <a:noFill/>
-        </p:spPr>
-        <p:txBody>
-          <a:bodyPr wrap="square">
-            <a:spAutoFit/>
-          </a:bodyPr>
-          <a:lstStyle/>
-          <a:p>
-            <a:pPr algn="ctr"/>
-            <a:r>
-              <a:rPr sz="2200" b="0" i="1">
-                <a:solidFill>
-                  <a:srgbClr val="8C8C8C"/>
-                </a:solidFill>
-                <a:latin typeface="Arial"/>
-              </a:rPr>
-              <a:t/>
-            </a:r>
-          </a:p>
-        </p:txBody>
-      </p:sp>
-      <p:sp>
-        <p:nvSpPr>
-          <p:cNvPr id="4" name="TextBox 3"/>
-          <p:cNvSpPr txBox="1"/>
-          <p:nvPr/>
-        </p:nvSpPr>
-        <p:spPr>
-          <a:xfrm>
-            <a:off x="594360" y="3529584"/>
-            <a:ext cx="11002975" cy="685800"/>
-          </a:xfrm>
-          <a:prstGeom prst="rect">
-            <a:avLst/>
-          </a:prstGeom>
-          <a:noFill/>
-        </p:spPr>
-        <p:txBody>
-          <a:bodyPr wrap="square">
-            <a:spAutoFit/>
-          </a:bodyPr>
-          <a:lstStyle/>
-          <a:p>
-            <a:pPr algn="ctr"/>
-            <a:r>
-              <a:rPr sz="3911" b="1" i="0">
+            <a:off x="640080" y="2985516"/>
+            <a:ext cx="10911535" cy="731520"/>
+          </a:xfrm>
+          <a:prstGeom prst="rect">
+            <a:avLst/>
+          </a:prstGeom>
+          <a:noFill/>
+        </p:spPr>
+        <p:txBody>
+          <a:bodyPr wrap="square">
+            <a:spAutoFit/>
+          </a:bodyPr>
+          <a:lstStyle/>
+          <a:p>
+            <a:pPr algn="ctr"/>
+            <a:r>
+              <a:rPr sz="4200" b="1" i="0">
                 <a:solidFill>
                   <a:srgbClr val="FFFFFF"/>
                 </a:solidFill>
                 <a:latin typeface="Arial"/>
               </a:rPr>
               <a:t>Não tem volta, não pode voltar atrás</a:t>
-            </a:r>
-          </a:p>
-        </p:txBody>
-      </p:sp>
-      <p:sp>
-        <p:nvSpPr>
-          <p:cNvPr id="5" name="TextBox 4"/>
-          <p:cNvSpPr txBox="1"/>
-          <p:nvPr/>
-        </p:nvSpPr>
-        <p:spPr>
-          <a:xfrm>
-            <a:off x="594360" y="4251960"/>
-            <a:ext cx="11002975" cy="347472"/>
-          </a:xfrm>
-          <a:prstGeom prst="rect">
-            <a:avLst/>
-          </a:prstGeom>
-          <a:noFill/>
-        </p:spPr>
-        <p:txBody>
-          <a:bodyPr wrap="square">
-            <a:spAutoFit/>
-          </a:bodyPr>
-          <a:lstStyle/>
-          <a:p>
-            <a:pPr algn="ctr"/>
-            <a:r>
-              <a:rPr sz="2200" b="0" i="1">
-                <a:solidFill>
-                  <a:srgbClr val="8C8C8C"/>
-                </a:solidFill>
-                <a:latin typeface="Arial"/>
-              </a:rPr>
-              <a:t/>
             </a:r>
           </a:p>
         </p:txBody>
@@ -7972,23 +7342,23 @@
         </p:nvSpPr>
         <p:spPr>
           <a:xfrm>
-            <a:off x="594360" y="1837944"/>
-            <a:ext cx="11002975" cy="685800"/>
-          </a:xfrm>
-          <a:prstGeom prst="rect">
-            <a:avLst/>
-          </a:prstGeom>
-          <a:noFill/>
-        </p:spPr>
-        <p:txBody>
-          <a:bodyPr wrap="square">
-            <a:spAutoFit/>
-          </a:bodyPr>
-          <a:lstStyle/>
-          <a:p>
-            <a:pPr algn="ctr"/>
-            <a:r>
-              <a:rPr sz="4400" b="1" i="0">
+            <a:off x="640080" y="1650492"/>
+            <a:ext cx="10911535" cy="731520"/>
+          </a:xfrm>
+          <a:prstGeom prst="rect">
+            <a:avLst/>
+          </a:prstGeom>
+          <a:noFill/>
+        </p:spPr>
+        <p:txBody>
+          <a:bodyPr wrap="square">
+            <a:spAutoFit/>
+          </a:bodyPr>
+          <a:lstStyle/>
+          <a:p>
+            <a:pPr algn="ctr"/>
+            <a:r>
+              <a:rPr sz="4800" b="1" i="0">
                 <a:solidFill>
                   <a:srgbClr val="FFFFFF"/>
                 </a:solidFill>
@@ -8007,8 +7377,8 @@
         </p:nvSpPr>
         <p:spPr>
           <a:xfrm>
-            <a:off x="594360" y="2560320"/>
-            <a:ext cx="11002975" cy="384048"/>
+            <a:off x="640080" y="2418588"/>
+            <a:ext cx="10911535" cy="365760"/>
           </a:xfrm>
           <a:prstGeom prst="rect">
             <a:avLst/>
@@ -8025,7 +7395,7 @@
             <a:r>
               <a:rPr sz="2400" b="0" i="1">
                 <a:solidFill>
-                  <a:srgbClr val="B4B4B4"/>
+                  <a:srgbClr val="AAAAAA"/>
                 </a:solidFill>
                 <a:latin typeface="Arial"/>
               </a:rPr>
@@ -8042,8 +7412,78 @@
         </p:nvSpPr>
         <p:spPr>
           <a:xfrm>
-            <a:off x="594360" y="2980944"/>
-            <a:ext cx="11002975" cy="347472"/>
+            <a:off x="640080" y="2985516"/>
+            <a:ext cx="10911535" cy="731520"/>
+          </a:xfrm>
+          <a:prstGeom prst="rect">
+            <a:avLst/>
+          </a:prstGeom>
+          <a:noFill/>
+        </p:spPr>
+        <p:txBody>
+          <a:bodyPr wrap="square">
+            <a:spAutoFit/>
+          </a:bodyPr>
+          <a:lstStyle/>
+          <a:p>
+            <a:pPr algn="ctr"/>
+            <a:r>
+              <a:rPr sz="4800" b="1" i="0">
+                <a:solidFill>
+                  <a:srgbClr val="FFFFFF"/>
+                </a:solidFill>
+                <a:latin typeface="Arial"/>
+              </a:rPr>
+              <a:t>我が 帰るべき     希望の御国</a:t>
+            </a:r>
+          </a:p>
+        </p:txBody>
+      </p:sp>
+      <p:sp>
+        <p:nvSpPr>
+          <p:cNvPr id="5" name="TextBox 4"/>
+          <p:cNvSpPr txBox="1"/>
+          <p:nvPr/>
+        </p:nvSpPr>
+        <p:spPr>
+          <a:xfrm>
+            <a:off x="640080" y="3753612"/>
+            <a:ext cx="10911535" cy="365760"/>
+          </a:xfrm>
+          <a:prstGeom prst="rect">
+            <a:avLst/>
+          </a:prstGeom>
+          <a:noFill/>
+        </p:spPr>
+        <p:txBody>
+          <a:bodyPr wrap="square">
+            <a:spAutoFit/>
+          </a:bodyPr>
+          <a:lstStyle/>
+          <a:p>
+            <a:pPr algn="ctr"/>
+            <a:r>
+              <a:rPr sz="2400" b="0" i="1">
+                <a:solidFill>
+                  <a:srgbClr val="AAAAAA"/>
+                </a:solidFill>
+                <a:latin typeface="Arial"/>
+              </a:rPr>
+              <a:t>waga kaeru beki kibou no o kuni</a:t>
+            </a:r>
+          </a:p>
+        </p:txBody>
+      </p:sp>
+      <p:sp>
+        <p:nvSpPr>
+          <p:cNvPr id="6" name="TextBox 5"/>
+          <p:cNvSpPr txBox="1"/>
+          <p:nvPr/>
+        </p:nvSpPr>
+        <p:spPr>
+          <a:xfrm>
+            <a:off x="640080" y="4530852"/>
+            <a:ext cx="10911535" cy="310896"/>
           </a:xfrm>
           <a:prstGeom prst="rect">
             <a:avLst/>
@@ -8060,81 +7500,11 @@
             <a:r>
               <a:rPr sz="2000" b="0" i="1">
                 <a:solidFill>
-                  <a:srgbClr val="8C8C8C"/>
-                </a:solidFill>
-                <a:latin typeface="Arial"/>
-              </a:rPr>
-              <a:t/>
-            </a:r>
-          </a:p>
-        </p:txBody>
-      </p:sp>
-      <p:sp>
-        <p:nvSpPr>
-          <p:cNvPr id="5" name="TextBox 4"/>
-          <p:cNvSpPr txBox="1"/>
-          <p:nvPr/>
-        </p:nvSpPr>
-        <p:spPr>
-          <a:xfrm>
-            <a:off x="594360" y="3529584"/>
-            <a:ext cx="11002975" cy="685800"/>
-          </a:xfrm>
-          <a:prstGeom prst="rect">
-            <a:avLst/>
-          </a:prstGeom>
-          <a:noFill/>
-        </p:spPr>
-        <p:txBody>
-          <a:bodyPr wrap="square">
-            <a:spAutoFit/>
-          </a:bodyPr>
-          <a:lstStyle/>
-          <a:p>
-            <a:pPr algn="ctr"/>
-            <a:r>
-              <a:rPr sz="4400" b="1" i="0">
-                <a:solidFill>
-                  <a:srgbClr val="FFFFFF"/>
-                </a:solidFill>
-                <a:latin typeface="Arial"/>
-              </a:rPr>
-              <a:t>我が 帰るべき     希望の御国</a:t>
-            </a:r>
-          </a:p>
-        </p:txBody>
-      </p:sp>
-      <p:sp>
-        <p:nvSpPr>
-          <p:cNvPr id="6" name="TextBox 5"/>
-          <p:cNvSpPr txBox="1"/>
-          <p:nvPr/>
-        </p:nvSpPr>
-        <p:spPr>
-          <a:xfrm>
-            <a:off x="594360" y="4251960"/>
-            <a:ext cx="11002975" cy="384048"/>
-          </a:xfrm>
-          <a:prstGeom prst="rect">
-            <a:avLst/>
-          </a:prstGeom>
-          <a:noFill/>
-        </p:spPr>
-        <p:txBody>
-          <a:bodyPr wrap="square">
-            <a:spAutoFit/>
-          </a:bodyPr>
-          <a:lstStyle/>
-          <a:p>
-            <a:pPr algn="ctr"/>
-            <a:r>
-              <a:rPr sz="2400" b="0" i="1">
-                <a:solidFill>
-                  <a:srgbClr val="B4B4B4"/>
-                </a:solidFill>
-                <a:latin typeface="Arial"/>
-              </a:rPr>
-              <a:t>waga kaeru beki kibou no o kuni</a:t>
+                  <a:srgbClr val="828282"/>
+                </a:solidFill>
+                <a:latin typeface="Arial"/>
+              </a:rPr>
+              <a:t>Cristo É Suficiente</a:t>
             </a:r>
           </a:p>
         </p:txBody>
@@ -8147,8 +7517,8 @@
         </p:nvSpPr>
         <p:spPr>
           <a:xfrm>
-            <a:off x="594360" y="4672584"/>
-            <a:ext cx="11002975" cy="347472"/>
+            <a:off x="640080" y="4896612"/>
+            <a:ext cx="10911535" cy="310896"/>
           </a:xfrm>
           <a:prstGeom prst="rect">
             <a:avLst/>
@@ -8165,11 +7535,11 @@
             <a:r>
               <a:rPr sz="2000" b="0" i="1">
                 <a:solidFill>
-                  <a:srgbClr val="8C8C8C"/>
-                </a:solidFill>
-                <a:latin typeface="Arial"/>
-              </a:rPr>
-              <a:t/>
+                  <a:srgbClr val="828282"/>
+                </a:solidFill>
+                <a:latin typeface="Arial"/>
+              </a:rPr>
+              <a:t>Cristo é a minha recompensa</a:t>
             </a:r>
           </a:p>
         </p:txBody>
@@ -8208,23 +7578,23 @@
         </p:nvSpPr>
         <p:spPr>
           <a:xfrm>
-            <a:off x="594360" y="1837944"/>
-            <a:ext cx="11002975" cy="685800"/>
-          </a:xfrm>
-          <a:prstGeom prst="rect">
-            <a:avLst/>
-          </a:prstGeom>
-          <a:noFill/>
-        </p:spPr>
-        <p:txBody>
-          <a:bodyPr wrap="square">
-            <a:spAutoFit/>
-          </a:bodyPr>
-          <a:lstStyle/>
-          <a:p>
-            <a:pPr algn="ctr"/>
-            <a:r>
-              <a:rPr sz="4400" b="1" i="0">
+            <a:off x="640080" y="1650492"/>
+            <a:ext cx="10911535" cy="731520"/>
+          </a:xfrm>
+          <a:prstGeom prst="rect">
+            <a:avLst/>
+          </a:prstGeom>
+          <a:noFill/>
+        </p:spPr>
+        <p:txBody>
+          <a:bodyPr wrap="square">
+            <a:spAutoFit/>
+          </a:bodyPr>
+          <a:lstStyle/>
+          <a:p>
+            <a:pPr algn="ctr"/>
+            <a:r>
+              <a:rPr sz="4800" b="1" i="0">
                 <a:solidFill>
                   <a:srgbClr val="FFFFFF"/>
                 </a:solidFill>
@@ -8243,8 +7613,8 @@
         </p:nvSpPr>
         <p:spPr>
           <a:xfrm>
-            <a:off x="594360" y="2560320"/>
-            <a:ext cx="11002975" cy="384048"/>
+            <a:off x="640080" y="2418588"/>
+            <a:ext cx="10911535" cy="365760"/>
           </a:xfrm>
           <a:prstGeom prst="rect">
             <a:avLst/>
@@ -8261,7 +7631,7 @@
             <a:r>
               <a:rPr sz="2400" b="0" i="1">
                 <a:solidFill>
-                  <a:srgbClr val="B4B4B4"/>
+                  <a:srgbClr val="AAAAAA"/>
                 </a:solidFill>
                 <a:latin typeface="Arial"/>
               </a:rPr>
@@ -8278,29 +7648,29 @@
         </p:nvSpPr>
         <p:spPr>
           <a:xfrm>
-            <a:off x="594360" y="2980944"/>
-            <a:ext cx="11002975" cy="347472"/>
-          </a:xfrm>
-          <a:prstGeom prst="rect">
-            <a:avLst/>
-          </a:prstGeom>
-          <a:noFill/>
-        </p:spPr>
-        <p:txBody>
-          <a:bodyPr wrap="square">
-            <a:spAutoFit/>
-          </a:bodyPr>
-          <a:lstStyle/>
-          <a:p>
-            <a:pPr algn="ctr"/>
-            <a:r>
-              <a:rPr sz="2000" b="0" i="1">
-                <a:solidFill>
-                  <a:srgbClr val="8C8C8C"/>
-                </a:solidFill>
-                <a:latin typeface="Arial"/>
-              </a:rPr>
-              <a:t/>
+            <a:off x="640080" y="2985516"/>
+            <a:ext cx="10911535" cy="731520"/>
+          </a:xfrm>
+          <a:prstGeom prst="rect">
+            <a:avLst/>
+          </a:prstGeom>
+          <a:noFill/>
+        </p:spPr>
+        <p:txBody>
+          <a:bodyPr wrap="square">
+            <a:spAutoFit/>
+          </a:bodyPr>
+          <a:lstStyle/>
+          <a:p>
+            <a:pPr algn="ctr"/>
+            <a:r>
+              <a:rPr sz="4800" b="1" i="0">
+                <a:solidFill>
+                  <a:srgbClr val="FFFFFF"/>
+                </a:solidFill>
+                <a:latin typeface="Arial"/>
+              </a:rPr>
+              <a:t>歌おう　主イエスに栄光</a:t>
             </a:r>
           </a:p>
         </p:txBody>
@@ -8313,43 +7683,8 @@
         </p:nvSpPr>
         <p:spPr>
           <a:xfrm>
-            <a:off x="594360" y="3529584"/>
-            <a:ext cx="11002975" cy="685800"/>
-          </a:xfrm>
-          <a:prstGeom prst="rect">
-            <a:avLst/>
-          </a:prstGeom>
-          <a:noFill/>
-        </p:spPr>
-        <p:txBody>
-          <a:bodyPr wrap="square">
-            <a:spAutoFit/>
-          </a:bodyPr>
-          <a:lstStyle/>
-          <a:p>
-            <a:pPr algn="ctr"/>
-            <a:r>
-              <a:rPr sz="4400" b="1" i="0">
-                <a:solidFill>
-                  <a:srgbClr val="FFFFFF"/>
-                </a:solidFill>
-                <a:latin typeface="Arial"/>
-              </a:rPr>
-              <a:t>歌おう　主イエスに栄光</a:t>
-            </a:r>
-          </a:p>
-        </p:txBody>
-      </p:sp>
-      <p:sp>
-        <p:nvSpPr>
-          <p:cNvPr id="6" name="TextBox 5"/>
-          <p:cNvSpPr txBox="1"/>
-          <p:nvPr/>
-        </p:nvSpPr>
-        <p:spPr>
-          <a:xfrm>
-            <a:off x="594360" y="4251960"/>
-            <a:ext cx="11002975" cy="384048"/>
+            <a:off x="640080" y="3753612"/>
+            <a:ext cx="10911535" cy="365760"/>
           </a:xfrm>
           <a:prstGeom prst="rect">
             <a:avLst/>
@@ -8366,46 +7701,11 @@
             <a:r>
               <a:rPr sz="2400" b="0" i="1">
                 <a:solidFill>
-                  <a:srgbClr val="B4B4B4"/>
+                  <a:srgbClr val="AAAAAA"/>
                 </a:solidFill>
                 <a:latin typeface="Arial"/>
               </a:rPr>
               <a:t>utao u shu iesu ni eikou</a:t>
-            </a:r>
-          </a:p>
-        </p:txBody>
-      </p:sp>
-      <p:sp>
-        <p:nvSpPr>
-          <p:cNvPr id="7" name="TextBox 6"/>
-          <p:cNvSpPr txBox="1"/>
-          <p:nvPr/>
-        </p:nvSpPr>
-        <p:spPr>
-          <a:xfrm>
-            <a:off x="594360" y="4672584"/>
-            <a:ext cx="11002975" cy="347472"/>
-          </a:xfrm>
-          <a:prstGeom prst="rect">
-            <a:avLst/>
-          </a:prstGeom>
-          <a:noFill/>
-        </p:spPr>
-        <p:txBody>
-          <a:bodyPr wrap="square">
-            <a:spAutoFit/>
-          </a:bodyPr>
-          <a:lstStyle/>
-          <a:p>
-            <a:pPr algn="ctr"/>
-            <a:r>
-              <a:rPr sz="2000" b="0" i="1">
-                <a:solidFill>
-                  <a:srgbClr val="8C8C8C"/>
-                </a:solidFill>
-                <a:latin typeface="Arial"/>
-              </a:rPr>
-              <a:t/>
             </a:r>
           </a:p>
         </p:txBody>

--- a/output_pptx/Christ_Is_Enough.pptx
+++ b/output_pptx/Christ_Is_Enough.pptx
@@ -3193,6 +3193,76 @@
           </a:p>
         </p:txBody>
       </p:sp>
+      <p:sp>
+        <p:nvSpPr>
+          <p:cNvPr id="4" name="TextBox 3"/>
+          <p:cNvSpPr txBox="1"/>
+          <p:nvPr/>
+        </p:nvSpPr>
+        <p:spPr>
+          <a:xfrm>
+            <a:off x="640080" y="4128516"/>
+            <a:ext cx="10911535" cy="310896"/>
+          </a:xfrm>
+          <a:prstGeom prst="rect">
+            <a:avLst/>
+          </a:prstGeom>
+          <a:noFill/>
+        </p:spPr>
+        <p:txBody>
+          <a:bodyPr wrap="square">
+            <a:spAutoFit/>
+          </a:bodyPr>
+          <a:lstStyle/>
+          <a:p>
+            <a:pPr algn="ctr"/>
+            <a:r>
+              <a:rPr sz="2000" b="0" i="0">
+                <a:solidFill>
+                  <a:srgbClr val="828282"/>
+                </a:solidFill>
+                <a:latin typeface="Arial"/>
+              </a:rPr>
+              <a:t>キリストで十分</a:t>
+            </a:r>
+          </a:p>
+        </p:txBody>
+      </p:sp>
+      <p:sp>
+        <p:nvSpPr>
+          <p:cNvPr id="5" name="TextBox 4"/>
+          <p:cNvSpPr txBox="1"/>
+          <p:nvPr/>
+        </p:nvSpPr>
+        <p:spPr>
+          <a:xfrm>
+            <a:off x="640080" y="4494276"/>
+            <a:ext cx="10911535" cy="310896"/>
+          </a:xfrm>
+          <a:prstGeom prst="rect">
+            <a:avLst/>
+          </a:prstGeom>
+          <a:noFill/>
+        </p:spPr>
+        <p:txBody>
+          <a:bodyPr wrap="square">
+            <a:spAutoFit/>
+          </a:bodyPr>
+          <a:lstStyle/>
+          <a:p>
+            <a:pPr algn="ctr"/>
+            <a:r>
+              <a:rPr sz="2000" b="0" i="0">
+                <a:solidFill>
+                  <a:srgbClr val="828282"/>
+                </a:solidFill>
+                <a:latin typeface="Arial"/>
+              </a:rPr>
+              <a:t>キリストは私の報酬</a:t>
+            </a:r>
+          </a:p>
+        </p:txBody>
+      </p:sp>
     </p:spTree>
   </p:cSld>
   <p:clrMapOvr>
@@ -3857,6 +3927,76 @@
           </a:p>
         </p:txBody>
       </p:sp>
+      <p:sp>
+        <p:nvSpPr>
+          <p:cNvPr id="4" name="TextBox 3"/>
+          <p:cNvSpPr txBox="1"/>
+          <p:nvPr/>
+        </p:nvSpPr>
+        <p:spPr>
+          <a:xfrm>
+            <a:off x="640080" y="4128516"/>
+            <a:ext cx="10911535" cy="310896"/>
+          </a:xfrm>
+          <a:prstGeom prst="rect">
+            <a:avLst/>
+          </a:prstGeom>
+          <a:noFill/>
+        </p:spPr>
+        <p:txBody>
+          <a:bodyPr wrap="square">
+            <a:spAutoFit/>
+          </a:bodyPr>
+          <a:lstStyle/>
+          <a:p>
+            <a:pPr algn="ctr"/>
+            <a:r>
+              <a:rPr sz="2000" b="0" i="0">
+                <a:solidFill>
+                  <a:srgbClr val="828282"/>
+                </a:solidFill>
+                <a:latin typeface="Arial"/>
+              </a:rPr>
+              <a:t>この希望は決して失われない</a:t>
+            </a:r>
+          </a:p>
+        </p:txBody>
+      </p:sp>
+      <p:sp>
+        <p:nvSpPr>
+          <p:cNvPr id="5" name="TextBox 4"/>
+          <p:cNvSpPr txBox="1"/>
+          <p:nvPr/>
+        </p:nvSpPr>
+        <p:spPr>
+          <a:xfrm>
+            <a:off x="640080" y="4494276"/>
+            <a:ext cx="10911535" cy="310896"/>
+          </a:xfrm>
+          <a:prstGeom prst="rect">
+            <a:avLst/>
+          </a:prstGeom>
+          <a:noFill/>
+        </p:spPr>
+        <p:txBody>
+          <a:bodyPr wrap="square">
+            <a:spAutoFit/>
+          </a:bodyPr>
+          <a:lstStyle/>
+          <a:p>
+            <a:pPr algn="ctr"/>
+            <a:r>
+              <a:rPr sz="2000" b="0" i="0">
+                <a:solidFill>
+                  <a:srgbClr val="828282"/>
+                </a:solidFill>
+                <a:latin typeface="Arial"/>
+              </a:rPr>
+              <a:t>天は私たちの住まい</a:t>
+            </a:r>
+          </a:p>
+        </p:txBody>
+      </p:sp>
     </p:spTree>
   </p:cSld>
   <p:clrMapOvr>
@@ -4285,6 +4425,76 @@
           </a:p>
         </p:txBody>
       </p:sp>
+      <p:sp>
+        <p:nvSpPr>
+          <p:cNvPr id="4" name="TextBox 3"/>
+          <p:cNvSpPr txBox="1"/>
+          <p:nvPr/>
+        </p:nvSpPr>
+        <p:spPr>
+          <a:xfrm>
+            <a:off x="640080" y="4128516"/>
+            <a:ext cx="10911535" cy="310896"/>
+          </a:xfrm>
+          <a:prstGeom prst="rect">
+            <a:avLst/>
+          </a:prstGeom>
+          <a:noFill/>
+        </p:spPr>
+        <p:txBody>
+          <a:bodyPr wrap="square">
+            <a:spAutoFit/>
+          </a:bodyPr>
+          <a:lstStyle/>
+          <a:p>
+            <a:pPr algn="ctr"/>
+            <a:r>
+              <a:rPr sz="2000" b="0" i="0">
+                <a:solidFill>
+                  <a:srgbClr val="828282"/>
+                </a:solidFill>
+                <a:latin typeface="Arial"/>
+              </a:rPr>
+              <a:t>戻ることはない、戻ることはない</a:t>
+            </a:r>
+          </a:p>
+        </p:txBody>
+      </p:sp>
+      <p:sp>
+        <p:nvSpPr>
+          <p:cNvPr id="5" name="TextBox 4"/>
+          <p:cNvSpPr txBox="1"/>
+          <p:nvPr/>
+        </p:nvSpPr>
+        <p:spPr>
+          <a:xfrm>
+            <a:off x="640080" y="4494276"/>
+            <a:ext cx="10911535" cy="310896"/>
+          </a:xfrm>
+          <a:prstGeom prst="rect">
+            <a:avLst/>
+          </a:prstGeom>
+          <a:noFill/>
+        </p:spPr>
+        <p:txBody>
+          <a:bodyPr wrap="square">
+            <a:spAutoFit/>
+          </a:bodyPr>
+          <a:lstStyle/>
+          <a:p>
+            <a:pPr algn="ctr"/>
+            <a:r>
+              <a:rPr sz="2000" b="0" i="0">
+                <a:solidFill>
+                  <a:srgbClr val="828282"/>
+                </a:solidFill>
+                <a:latin typeface="Arial"/>
+              </a:rPr>
+              <a:t>私の前の十字架</a:t>
+            </a:r>
+          </a:p>
+        </p:txBody>
+      </p:sp>
     </p:spTree>
   </p:cSld>
   <p:clrMapOvr>
@@ -4713,6 +4923,76 @@
           </a:p>
         </p:txBody>
       </p:sp>
+      <p:sp>
+        <p:nvSpPr>
+          <p:cNvPr id="4" name="TextBox 3"/>
+          <p:cNvSpPr txBox="1"/>
+          <p:nvPr/>
+        </p:nvSpPr>
+        <p:spPr>
+          <a:xfrm>
+            <a:off x="640080" y="4128516"/>
+            <a:ext cx="10911535" cy="310896"/>
+          </a:xfrm>
+          <a:prstGeom prst="rect">
+            <a:avLst/>
+          </a:prstGeom>
+          <a:noFill/>
+        </p:spPr>
+        <p:txBody>
+          <a:bodyPr wrap="square">
+            <a:spAutoFit/>
+          </a:bodyPr>
+          <a:lstStyle/>
+          <a:p>
+            <a:pPr algn="ctr"/>
+            <a:r>
+              <a:rPr sz="2000" b="0" i="0">
+                <a:solidFill>
+                  <a:srgbClr val="828282"/>
+                </a:solidFill>
+                <a:latin typeface="Arial"/>
+              </a:rPr>
+              <a:t>世界は私の後ろに</a:t>
+            </a:r>
+          </a:p>
+        </p:txBody>
+      </p:sp>
+      <p:sp>
+        <p:nvSpPr>
+          <p:cNvPr id="5" name="TextBox 4"/>
+          <p:cNvSpPr txBox="1"/>
+          <p:nvPr/>
+        </p:nvSpPr>
+        <p:spPr>
+          <a:xfrm>
+            <a:off x="640080" y="4494276"/>
+            <a:ext cx="10911535" cy="310896"/>
+          </a:xfrm>
+          <a:prstGeom prst="rect">
+            <a:avLst/>
+          </a:prstGeom>
+          <a:noFill/>
+        </p:spPr>
+        <p:txBody>
+          <a:bodyPr wrap="square">
+            <a:spAutoFit/>
+          </a:bodyPr>
+          <a:lstStyle/>
+          <a:p>
+            <a:pPr algn="ctr"/>
+            <a:r>
+              <a:rPr sz="2000" b="0" i="0">
+                <a:solidFill>
+                  <a:srgbClr val="828282"/>
+                </a:solidFill>
+                <a:latin typeface="Arial"/>
+              </a:rPr>
+              <a:t>戻ることはない、後戻りできない</a:t>
+            </a:r>
+          </a:p>
+        </p:txBody>
+      </p:sp>
     </p:spTree>
   </p:cSld>
   <p:clrMapOvr>
@@ -4809,6 +5089,76 @@
           </a:p>
         </p:txBody>
       </p:sp>
+      <p:sp>
+        <p:nvSpPr>
+          <p:cNvPr id="4" name="TextBox 3"/>
+          <p:cNvSpPr txBox="1"/>
+          <p:nvPr/>
+        </p:nvSpPr>
+        <p:spPr>
+          <a:xfrm>
+            <a:off x="640080" y="4128516"/>
+            <a:ext cx="10911535" cy="310896"/>
+          </a:xfrm>
+          <a:prstGeom prst="rect">
+            <a:avLst/>
+          </a:prstGeom>
+          <a:noFill/>
+        </p:spPr>
+        <p:txBody>
+          <a:bodyPr wrap="square">
+            <a:spAutoFit/>
+          </a:bodyPr>
+          <a:lstStyle/>
+          <a:p>
+            <a:pPr algn="ctr"/>
+            <a:r>
+              <a:rPr sz="2000" b="0" i="0">
+                <a:solidFill>
+                  <a:srgbClr val="828282"/>
+                </a:solidFill>
+                <a:latin typeface="Arial"/>
+              </a:rPr>
+              <a:t>そして私のすべての献身</a:t>
+            </a:r>
+          </a:p>
+        </p:txBody>
+      </p:sp>
+      <p:sp>
+        <p:nvSpPr>
+          <p:cNvPr id="5" name="TextBox 4"/>
+          <p:cNvSpPr txBox="1"/>
+          <p:nvPr/>
+        </p:nvSpPr>
+        <p:spPr>
+          <a:xfrm>
+            <a:off x="640080" y="4494276"/>
+            <a:ext cx="10911535" cy="310896"/>
+          </a:xfrm>
+          <a:prstGeom prst="rect">
+            <a:avLst/>
+          </a:prstGeom>
+          <a:noFill/>
+        </p:spPr>
+        <p:txBody>
+          <a:bodyPr wrap="square">
+            <a:spAutoFit/>
+          </a:bodyPr>
+          <a:lstStyle/>
+          <a:p>
+            <a:pPr algn="ctr"/>
+            <a:r>
+              <a:rPr sz="2000" b="0" i="0">
+                <a:solidFill>
+                  <a:srgbClr val="828282"/>
+                </a:solidFill>
+                <a:latin typeface="Arial"/>
+              </a:rPr>
+              <a:t>今、この世界には何もない</a:t>
+            </a:r>
+          </a:p>
+        </p:txBody>
+      </p:sp>
     </p:spTree>
   </p:cSld>
   <p:clrMapOvr>
@@ -4905,6 +5255,76 @@
           </a:p>
         </p:txBody>
       </p:sp>
+      <p:sp>
+        <p:nvSpPr>
+          <p:cNvPr id="4" name="TextBox 3"/>
+          <p:cNvSpPr txBox="1"/>
+          <p:nvPr/>
+        </p:nvSpPr>
+        <p:spPr>
+          <a:xfrm>
+            <a:off x="640080" y="4128516"/>
+            <a:ext cx="10911535" cy="310896"/>
+          </a:xfrm>
+          <a:prstGeom prst="rect">
+            <a:avLst/>
+          </a:prstGeom>
+          <a:noFill/>
+        </p:spPr>
+        <p:txBody>
+          <a:bodyPr wrap="square">
+            <a:spAutoFit/>
+          </a:bodyPr>
+          <a:lstStyle/>
+          <a:p>
+            <a:pPr algn="ctr"/>
+            <a:r>
+              <a:rPr sz="2000" b="0" i="0">
+                <a:solidFill>
+                  <a:srgbClr val="828282"/>
+                </a:solidFill>
+                <a:latin typeface="Arial"/>
+              </a:rPr>
+              <a:t>世界は私の後ろに</a:t>
+            </a:r>
+          </a:p>
+        </p:txBody>
+      </p:sp>
+      <p:sp>
+        <p:nvSpPr>
+          <p:cNvPr id="5" name="TextBox 4"/>
+          <p:cNvSpPr txBox="1"/>
+          <p:nvPr/>
+        </p:nvSpPr>
+        <p:spPr>
+          <a:xfrm>
+            <a:off x="640080" y="4494276"/>
+            <a:ext cx="10911535" cy="310896"/>
+          </a:xfrm>
+          <a:prstGeom prst="rect">
+            <a:avLst/>
+          </a:prstGeom>
+          <a:noFill/>
+        </p:spPr>
+        <p:txBody>
+          <a:bodyPr wrap="square">
+            <a:spAutoFit/>
+          </a:bodyPr>
+          <a:lstStyle/>
+          <a:p>
+            <a:pPr algn="ctr"/>
+            <a:r>
+              <a:rPr sz="2000" b="0" i="0">
+                <a:solidFill>
+                  <a:srgbClr val="828282"/>
+                </a:solidFill>
+                <a:latin typeface="Arial"/>
+              </a:rPr>
+              <a:t>戻ることはない、後戻りできない</a:t>
+            </a:r>
+          </a:p>
+        </p:txBody>
+      </p:sp>
     </p:spTree>
   </p:cSld>
   <p:clrMapOvr>
@@ -6784,6 +7204,76 @@
           </a:p>
         </p:txBody>
       </p:sp>
+      <p:sp>
+        <p:nvSpPr>
+          <p:cNvPr id="4" name="TextBox 3"/>
+          <p:cNvSpPr txBox="1"/>
+          <p:nvPr/>
+        </p:nvSpPr>
+        <p:spPr>
+          <a:xfrm>
+            <a:off x="640080" y="4128516"/>
+            <a:ext cx="10911535" cy="310896"/>
+          </a:xfrm>
+          <a:prstGeom prst="rect">
+            <a:avLst/>
+          </a:prstGeom>
+          <a:noFill/>
+        </p:spPr>
+        <p:txBody>
+          <a:bodyPr wrap="square">
+            <a:spAutoFit/>
+          </a:bodyPr>
+          <a:lstStyle/>
+          <a:p>
+            <a:pPr algn="ctr"/>
+            <a:r>
+              <a:rPr sz="2000" b="0" i="0">
+                <a:solidFill>
+                  <a:srgbClr val="828282"/>
+                </a:solidFill>
+                <a:latin typeface="Arial"/>
+              </a:rPr>
+              <a:t>私を満たすことができるものは</a:t>
+            </a:r>
+          </a:p>
+        </p:txBody>
+      </p:sp>
+      <p:sp>
+        <p:nvSpPr>
+          <p:cNvPr id="5" name="TextBox 4"/>
+          <p:cNvSpPr txBox="1"/>
+          <p:nvPr/>
+        </p:nvSpPr>
+        <p:spPr>
+          <a:xfrm>
+            <a:off x="640080" y="4494276"/>
+            <a:ext cx="10911535" cy="310896"/>
+          </a:xfrm>
+          <a:prstGeom prst="rect">
+            <a:avLst/>
+          </a:prstGeom>
+          <a:noFill/>
+        </p:spPr>
+        <p:txBody>
+          <a:bodyPr wrap="square">
+            <a:spAutoFit/>
+          </a:bodyPr>
+          <a:lstStyle/>
+          <a:p>
+            <a:pPr algn="ctr"/>
+            <a:r>
+              <a:rPr sz="2000" b="0" i="0">
+                <a:solidFill>
+                  <a:srgbClr val="828282"/>
+                </a:solidFill>
+                <a:latin typeface="Arial"/>
+              </a:rPr>
+              <a:t>すべての試練を通して</a:t>
+            </a:r>
+          </a:p>
+        </p:txBody>
+      </p:sp>
     </p:spTree>
   </p:cSld>
   <p:clrMapOvr>
@@ -7212,6 +7702,76 @@
           </a:p>
         </p:txBody>
       </p:sp>
+      <p:sp>
+        <p:nvSpPr>
+          <p:cNvPr id="4" name="TextBox 3"/>
+          <p:cNvSpPr txBox="1"/>
+          <p:nvPr/>
+        </p:nvSpPr>
+        <p:spPr>
+          <a:xfrm>
+            <a:off x="640080" y="4128516"/>
+            <a:ext cx="10911535" cy="310896"/>
+          </a:xfrm>
+          <a:prstGeom prst="rect">
+            <a:avLst/>
+          </a:prstGeom>
+          <a:noFill/>
+        </p:spPr>
+        <p:txBody>
+          <a:bodyPr wrap="square">
+            <a:spAutoFit/>
+          </a:bodyPr>
+          <a:lstStyle/>
+          <a:p>
+            <a:pPr algn="ctr"/>
+            <a:r>
+              <a:rPr sz="2000" b="0" i="0">
+                <a:solidFill>
+                  <a:srgbClr val="828282"/>
+                </a:solidFill>
+                <a:latin typeface="Arial"/>
+              </a:rPr>
+              <a:t>世界は私の後ろに</a:t>
+            </a:r>
+          </a:p>
+        </p:txBody>
+      </p:sp>
+      <p:sp>
+        <p:nvSpPr>
+          <p:cNvPr id="5" name="TextBox 4"/>
+          <p:cNvSpPr txBox="1"/>
+          <p:nvPr/>
+        </p:nvSpPr>
+        <p:spPr>
+          <a:xfrm>
+            <a:off x="640080" y="4494276"/>
+            <a:ext cx="10911535" cy="310896"/>
+          </a:xfrm>
+          <a:prstGeom prst="rect">
+            <a:avLst/>
+          </a:prstGeom>
+          <a:noFill/>
+        </p:spPr>
+        <p:txBody>
+          <a:bodyPr wrap="square">
+            <a:spAutoFit/>
+          </a:bodyPr>
+          <a:lstStyle/>
+          <a:p>
+            <a:pPr algn="ctr"/>
+            <a:r>
+              <a:rPr sz="2000" b="0" i="0">
+                <a:solidFill>
+                  <a:srgbClr val="828282"/>
+                </a:solidFill>
+                <a:latin typeface="Arial"/>
+              </a:rPr>
+              <a:t>戻ることはない、後戻りできない</a:t>
+            </a:r>
+          </a:p>
+        </p:txBody>
+      </p:sp>
     </p:spTree>
   </p:cSld>
   <p:clrMapOvr>
@@ -7308,6 +7868,76 @@
           </a:p>
         </p:txBody>
       </p:sp>
+      <p:sp>
+        <p:nvSpPr>
+          <p:cNvPr id="4" name="TextBox 3"/>
+          <p:cNvSpPr txBox="1"/>
+          <p:nvPr/>
+        </p:nvSpPr>
+        <p:spPr>
+          <a:xfrm>
+            <a:off x="640080" y="4128516"/>
+            <a:ext cx="10911535" cy="310896"/>
+          </a:xfrm>
+          <a:prstGeom prst="rect">
+            <a:avLst/>
+          </a:prstGeom>
+          <a:noFill/>
+        </p:spPr>
+        <p:txBody>
+          <a:bodyPr wrap="square">
+            <a:spAutoFit/>
+          </a:bodyPr>
+          <a:lstStyle/>
+          <a:p>
+            <a:pPr algn="ctr"/>
+            <a:r>
+              <a:rPr sz="2000" b="0" i="0">
+                <a:solidFill>
+                  <a:srgbClr val="828282"/>
+                </a:solidFill>
+                <a:latin typeface="Arial"/>
+              </a:rPr>
+              <a:t>世界は私の後ろに</a:t>
+            </a:r>
+          </a:p>
+        </p:txBody>
+      </p:sp>
+      <p:sp>
+        <p:nvSpPr>
+          <p:cNvPr id="5" name="TextBox 4"/>
+          <p:cNvSpPr txBox="1"/>
+          <p:nvPr/>
+        </p:nvSpPr>
+        <p:spPr>
+          <a:xfrm>
+            <a:off x="640080" y="4494276"/>
+            <a:ext cx="10911535" cy="310896"/>
+          </a:xfrm>
+          <a:prstGeom prst="rect">
+            <a:avLst/>
+          </a:prstGeom>
+          <a:noFill/>
+        </p:spPr>
+        <p:txBody>
+          <a:bodyPr wrap="square">
+            <a:spAutoFit/>
+          </a:bodyPr>
+          <a:lstStyle/>
+          <a:p>
+            <a:pPr algn="ctr"/>
+            <a:r>
+              <a:rPr sz="2000" b="0" i="0">
+                <a:solidFill>
+                  <a:srgbClr val="828282"/>
+                </a:solidFill>
+                <a:latin typeface="Arial"/>
+              </a:rPr>
+              <a:t>戻ることはない、後戻りできない</a:t>
+            </a:r>
+          </a:p>
+        </p:txBody>
+      </p:sp>
     </p:spTree>
   </p:cSld>
   <p:clrMapOvr>
@@ -7706,6 +8336,76 @@
                 <a:latin typeface="Arial"/>
               </a:rPr>
               <a:t>utao u shu iesu ni eikou</a:t>
+            </a:r>
+          </a:p>
+        </p:txBody>
+      </p:sp>
+      <p:sp>
+        <p:nvSpPr>
+          <p:cNvPr id="6" name="TextBox 5"/>
+          <p:cNvSpPr txBox="1"/>
+          <p:nvPr/>
+        </p:nvSpPr>
+        <p:spPr>
+          <a:xfrm>
+            <a:off x="640080" y="4530852"/>
+            <a:ext cx="10911535" cy="310896"/>
+          </a:xfrm>
+          <a:prstGeom prst="rect">
+            <a:avLst/>
+          </a:prstGeom>
+          <a:noFill/>
+        </p:spPr>
+        <p:txBody>
+          <a:bodyPr wrap="square">
+            <a:spAutoFit/>
+          </a:bodyPr>
+          <a:lstStyle/>
+          <a:p>
+            <a:pPr algn="ctr"/>
+            <a:r>
+              <a:rPr sz="2000" b="0" i="1">
+                <a:solidFill>
+                  <a:srgbClr val="828282"/>
+                </a:solidFill>
+                <a:latin typeface="Arial"/>
+              </a:rPr>
+              <a:t>Mesmo em meio à tempestade</a:t>
+            </a:r>
+          </a:p>
+        </p:txBody>
+      </p:sp>
+      <p:sp>
+        <p:nvSpPr>
+          <p:cNvPr id="7" name="TextBox 6"/>
+          <p:cNvSpPr txBox="1"/>
+          <p:nvPr/>
+        </p:nvSpPr>
+        <p:spPr>
+          <a:xfrm>
+            <a:off x="640080" y="4896612"/>
+            <a:ext cx="10911535" cy="310896"/>
+          </a:xfrm>
+          <a:prstGeom prst="rect">
+            <a:avLst/>
+          </a:prstGeom>
+          <a:noFill/>
+        </p:spPr>
+        <p:txBody>
+          <a:bodyPr wrap="square">
+            <a:spAutoFit/>
+          </a:bodyPr>
+          <a:lstStyle/>
+          <a:p>
+            <a:pPr algn="ctr"/>
+            <a:r>
+              <a:rPr sz="2000" b="0" i="1">
+                <a:solidFill>
+                  <a:srgbClr val="828282"/>
+                </a:solidFill>
+                <a:latin typeface="Arial"/>
+              </a:rPr>
+              <a:t>Cantemos glória ao Senhor Jesus</a:t>
             </a:r>
           </a:p>
         </p:txBody>
